--- a/experiments/exp163_models_teach_contacts_v1_to_refine_a/exp163_deck.pptx
+++ b/experiments/exp163_models_teach_contacts_v1_to_refine_a/exp163_deck.pptx
@@ -20,6 +20,8 @@
     <p:sldId id="268" r:id="rId19"/>
     <p:sldId id="269" r:id="rId20"/>
     <p:sldId id="270" r:id="rId21"/>
+    <p:sldId id="271" r:id="rId22"/>
+    <p:sldId id="272" r:id="rId23"/>
   </p:sldIdLst>
   <p:sldSz cx="12191695" cy="6858000" type="screen4x3"/>
   <p:notesSz cx="6858000" cy="9144000"/>
@@ -866,6 +868,240 @@
         <c:crosses val="autoZero"/>
       </c:valAx>
     </c:plotArea>
+    <c:dispBlanksAs val="gap"/>
+  </c:chart>
+  <c:txPr>
+    <a:bodyPr/>
+    <a:lstStyle/>
+    <a:p>
+      <a:pPr>
+        <a:defRPr sz="1800"/>
+      </a:pPr>
+      <a:endParaRPr lang="en-US"/>
+    </a:p>
+  </c:txPr>
+  <c:externalData r:id="rId1">
+    <c:autoUpdate val="0"/>
+  </c:externalData>
+</c:chartSpace>
+</file>
+
+<file path=ppt/charts/chart4.xml><?xml version="1.0" encoding="utf-8"?>
+<c:chartSpace xmlns:c="http://schemas.openxmlformats.org/drawingml/2006/chart" xmlns:a="http://schemas.openxmlformats.org/drawingml/2006/main" xmlns:r="http://schemas.openxmlformats.org/officeDocument/2006/relationships">
+  <c:date1904 val="0"/>
+  <c:chart>
+    <c:autoTitleDeleted val="1"/>
+    <c:plotArea>
+      <c:barChart>
+        <c:barDir val="col"/>
+        <c:grouping val="clustered"/>
+        <c:ser>
+          <c:idx val="0"/>
+          <c:order val="0"/>
+          <c:tx>
+            <c:strRef>
+              <c:f>Sheet1!$B$1</c:f>
+              <c:strCache>
+                <c:ptCount val="1"/>
+                <c:pt idx="0">
+                  <c:v>K0 (no candidates)</c:v>
+                </c:pt>
+              </c:strCache>
+            </c:strRef>
+          </c:tx>
+          <c:spPr>
+            <a:solidFill>
+              <a:srgbClr val="6B748C"/>
+            </a:solidFill>
+          </c:spPr>
+          <c:cat>
+            <c:strRef>
+              <c:f>Sheet1!$A$2:$A$3</c:f>
+              <c:strCache>
+                <c:ptCount val="2"/>
+                <c:pt idx="0">
+                  <c:v>base</c:v>
+                </c:pt>
+                <c:pt idx="1">
+                  <c:v>refiner</c:v>
+                </c:pt>
+              </c:strCache>
+            </c:strRef>
+          </c:cat>
+          <c:val>
+            <c:numRef>
+              <c:f>Sheet1!$B$2:$B$3</c:f>
+              <c:numCache>
+                <c:formatCode>General</c:formatCode>
+                <c:ptCount val="2"/>
+                <c:pt idx="0">
+                  <c:v>0.3355</c:v>
+                </c:pt>
+                <c:pt idx="1">
+                  <c:v>0.1978</c:v>
+                </c:pt>
+              </c:numCache>
+            </c:numRef>
+          </c:val>
+        </c:ser>
+        <c:ser>
+          <c:idx val="1"/>
+          <c:order val="1"/>
+          <c:tx>
+            <c:strRef>
+              <c:f>Sheet1!$C$1</c:f>
+              <c:strCache>
+                <c:ptCount val="1"/>
+                <c:pt idx="0">
+                  <c:v>+ consensus block</c:v>
+                </c:pt>
+              </c:strCache>
+            </c:strRef>
+          </c:tx>
+          <c:spPr>
+            <a:solidFill>
+              <a:srgbClr val="1C7293"/>
+            </a:solidFill>
+          </c:spPr>
+          <c:cat>
+            <c:strRef>
+              <c:f>Sheet1!$A$2:$A$3</c:f>
+              <c:strCache>
+                <c:ptCount val="2"/>
+                <c:pt idx="0">
+                  <c:v>base</c:v>
+                </c:pt>
+                <c:pt idx="1">
+                  <c:v>refiner</c:v>
+                </c:pt>
+              </c:strCache>
+            </c:strRef>
+          </c:cat>
+          <c:val>
+            <c:numRef>
+              <c:f>Sheet1!$C$2:$C$3</c:f>
+              <c:numCache>
+                <c:formatCode>General</c:formatCode>
+                <c:ptCount val="2"/>
+                <c:pt idx="0">
+                  <c:v>0.2023</c:v>
+                </c:pt>
+                <c:pt idx="1">
+                  <c:v>0.222</c:v>
+                </c:pt>
+              </c:numCache>
+            </c:numRef>
+          </c:val>
+        </c:ser>
+        <c:dLbls>
+          <c:numFmt formatCode="0.000" sourceLinked="0"/>
+          <c:txPr>
+            <a:bodyPr/>
+            <a:lstStyle/>
+            <a:p>
+              <a:pPr>
+                <a:defRPr sz="1100" b="1">
+                  <a:latin typeface="Calibri"/>
+                </a:defRPr>
+              </a:pPr>
+            </a:p>
+          </c:txPr>
+          <c:dLblPos val="outEnd"/>
+          <c:showLegendKey val="0"/>
+          <c:showVal val="1"/>
+          <c:showCatName val="0"/>
+          <c:showSerName val="0"/>
+          <c:showPercent val="0"/>
+          <c:showBubbleSize val="0"/>
+          <c:showLeaderLines val="1"/>
+        </c:dLbls>
+        <c:axId val="-2068027336"/>
+        <c:axId val="-2113994440"/>
+      </c:barChart>
+      <c:catAx>
+        <c:axId val="-2068027336"/>
+        <c:scaling>
+          <c:orientation val="minMax"/>
+        </c:scaling>
+        <c:delete val="0"/>
+        <c:axPos val="b"/>
+        <c:majorTickMark val="out"/>
+        <c:minorTickMark val="none"/>
+        <c:tickLblPos val="nextTo"/>
+        <c:txPr>
+          <a:bodyPr/>
+          <a:lstStyle/>
+          <a:p>
+            <a:pPr>
+              <a:defRPr sz="1100">
+                <a:solidFill>
+                  <a:srgbClr val="6B748C"/>
+                </a:solidFill>
+                <a:latin typeface="Calibri"/>
+              </a:defRPr>
+            </a:pPr>
+          </a:p>
+        </c:txPr>
+        <c:crossAx val="-2113994440"/>
+        <c:crosses val="autoZero"/>
+        <c:auto val="1"/>
+        <c:lblAlgn val="ctr"/>
+        <c:lblOffset val="100"/>
+        <c:noMultiLvlLbl val="0"/>
+      </c:catAx>
+      <c:valAx>
+        <c:axId val="-2113994440"/>
+        <c:scaling>
+          <c:max val="0.4"/>
+          <c:min val="0.0"/>
+        </c:scaling>
+        <c:delete val="0"/>
+        <c:axPos val="l"/>
+        <c:majorGridlines>
+          <c:spPr>
+            <a:ln w="9525">
+              <a:solidFill>
+                <a:srgbClr val="DDE3EC"/>
+              </a:solidFill>
+            </a:ln>
+          </c:spPr>
+        </c:majorGridlines>
+        <c:majorTickMark val="out"/>
+        <c:minorTickMark val="none"/>
+        <c:tickLblPos val="nextTo"/>
+        <c:txPr>
+          <a:bodyPr/>
+          <a:lstStyle/>
+          <a:p>
+            <a:pPr>
+              <a:defRPr sz="1100">
+                <a:solidFill>
+                  <a:srgbClr val="6B748C"/>
+                </a:solidFill>
+                <a:latin typeface="Calibri"/>
+              </a:defRPr>
+            </a:pPr>
+          </a:p>
+        </c:txPr>
+        <c:crossAx val="-2068027336"/>
+        <c:crosses val="autoZero"/>
+      </c:valAx>
+    </c:plotArea>
+    <c:legend>
+      <c:legendPos val="b"/>
+      <c:overlay val="0"/>
+      <c:txPr>
+        <a:bodyPr/>
+        <a:lstStyle/>
+        <a:p>
+          <a:pPr>
+            <a:defRPr sz="1100">
+              <a:latin typeface="Calibri"/>
+            </a:defRPr>
+          </a:pPr>
+        </a:p>
+      </c:txPr>
+    </c:legend>
     <c:dispBlanksAs val="gap"/>
   </c:chart>
   <c:txPr>
@@ -6933,7 +7169,7 @@
                 </a:solidFill>
                 <a:latin typeface="Cambria"/>
               </a:rPr>
-              <a:t>Phase 3 — evaluation, in flight</a:t>
+              <a:t>Phase 3 — the verdict</a:t>
             </a:r>
           </a:p>
         </p:txBody>
@@ -6972,21 +7208,797 @@
                 </a:solidFill>
                 <a:latin typeface="Calibri"/>
               </a:rPr>
-              <a:t>The 10k corpus has no held-out protein split, so the headline test runs on the exp89 eval set.</a:t>
-            </a:r>
-          </a:p>
-        </p:txBody>
-      </p:sp>
-      <p:sp>
-        <p:nvSpPr>
-          <p:cNvPr id="4" name="Rounded Rectangle 3"/>
+              <a:t>553 exp89 eval proteins, paired, identical candidate contexts for both models.</a:t>
+            </a:r>
+          </a:p>
+        </p:txBody>
+      </p:sp>
+      <p:graphicFrame>
+        <p:nvGraphicFramePr>
+          <p:cNvPr id="4" name="Table 3"/>
+          <p:cNvGraphicFramePr>
+            <a:graphicFrameLocks noGrp="1"/>
+          </p:cNvGraphicFramePr>
+          <p:nvPr/>
+        </p:nvGraphicFramePr>
+        <p:xfrm>
+          <a:off x="685800" y="1828800"/>
+          <a:ext cx="10469880" cy="1536192"/>
+        </p:xfrm>
+        <a:graphic>
+          <a:graphicData uri="http://schemas.openxmlformats.org/drawingml/2006/table">
+            <a:tbl>
+              <a:tblPr firstRow="1" bandRow="1">
+                <a:tableStyleId>{5C22544A-7EE6-4342-B048-85BDC9FD1C3A}</a:tableStyleId>
+              </a:tblPr>
+              <a:tblGrid>
+                <a:gridCol w="2331720"/>
+                <a:gridCol w="1234440"/>
+                <a:gridCol w="1097280"/>
+                <a:gridCol w="1097280"/>
+                <a:gridCol w="1097280"/>
+                <a:gridCol w="1097280"/>
+                <a:gridCol w="1097280"/>
+                <a:gridCol w="1417320"/>
+              </a:tblGrid>
+              <a:tr h="384048">
+                <a:tc>
+                  <a:txBody>
+                    <a:bodyPr wrap="square"/>
+                    <a:lstStyle/>
+                    <a:p>
+                      <a:pPr algn="l"/>
+                      <a:r>
+                        <a:rPr sz="1250" b="1">
+                          <a:solidFill>
+                            <a:srgbClr val="FFFFFF"/>
+                          </a:solidFill>
+                          <a:latin typeface="Calibri"/>
+                        </a:rPr>
+                        <a:t>model</a:t>
+                      </a:r>
+                    </a:p>
+                  </a:txBody>
+                  <a:tcPr marL="91440" marR="73152" marT="27432" marB="27432" anchor="ctr">
+                    <a:solidFill>
+                      <a:srgbClr val="21295C"/>
+                    </a:solidFill>
+                  </a:tcPr>
+                </a:tc>
+                <a:tc>
+                  <a:txBody>
+                    <a:bodyPr wrap="square"/>
+                    <a:lstStyle/>
+                    <a:p>
+                      <a:pPr algn="ctr"/>
+                      <a:r>
+                        <a:rPr sz="1250" b="1">
+                          <a:solidFill>
+                            <a:srgbClr val="FFFFFF"/>
+                          </a:solidFill>
+                          <a:latin typeface="Calibri"/>
+                        </a:rPr>
+                        <a:t>K0</a:t>
+                      </a:r>
+                    </a:p>
+                  </a:txBody>
+                  <a:tcPr marL="91440" marR="73152" marT="27432" marB="27432" anchor="ctr">
+                    <a:solidFill>
+                      <a:srgbClr val="21295C"/>
+                    </a:solidFill>
+                  </a:tcPr>
+                </a:tc>
+                <a:tc>
+                  <a:txBody>
+                    <a:bodyPr wrap="square"/>
+                    <a:lstStyle/>
+                    <a:p>
+                      <a:pPr algn="ctr"/>
+                      <a:r>
+                        <a:rPr sz="1250" b="1">
+                          <a:solidFill>
+                            <a:srgbClr val="FFFFFF"/>
+                          </a:solidFill>
+                          <a:latin typeface="Calibri"/>
+                        </a:rPr>
+                        <a:t>K1</a:t>
+                      </a:r>
+                    </a:p>
+                  </a:txBody>
+                  <a:tcPr marL="91440" marR="73152" marT="27432" marB="27432" anchor="ctr">
+                    <a:solidFill>
+                      <a:srgbClr val="21295C"/>
+                    </a:solidFill>
+                  </a:tcPr>
+                </a:tc>
+                <a:tc>
+                  <a:txBody>
+                    <a:bodyPr wrap="square"/>
+                    <a:lstStyle/>
+                    <a:p>
+                      <a:pPr algn="ctr"/>
+                      <a:r>
+                        <a:rPr sz="1250" b="1">
+                          <a:solidFill>
+                            <a:srgbClr val="FFFFFF"/>
+                          </a:solidFill>
+                          <a:latin typeface="Calibri"/>
+                        </a:rPr>
+                        <a:t>K2</a:t>
+                      </a:r>
+                    </a:p>
+                  </a:txBody>
+                  <a:tcPr marL="91440" marR="73152" marT="27432" marB="27432" anchor="ctr">
+                    <a:solidFill>
+                      <a:srgbClr val="21295C"/>
+                    </a:solidFill>
+                  </a:tcPr>
+                </a:tc>
+                <a:tc>
+                  <a:txBody>
+                    <a:bodyPr wrap="square"/>
+                    <a:lstStyle/>
+                    <a:p>
+                      <a:pPr algn="ctr"/>
+                      <a:r>
+                        <a:rPr sz="1250" b="1">
+                          <a:solidFill>
+                            <a:srgbClr val="FFFFFF"/>
+                          </a:solidFill>
+                          <a:latin typeface="Calibri"/>
+                        </a:rPr>
+                        <a:t>K4</a:t>
+                      </a:r>
+                    </a:p>
+                  </a:txBody>
+                  <a:tcPr marL="91440" marR="73152" marT="27432" marB="27432" anchor="ctr">
+                    <a:solidFill>
+                      <a:srgbClr val="21295C"/>
+                    </a:solidFill>
+                  </a:tcPr>
+                </a:tc>
+                <a:tc>
+                  <a:txBody>
+                    <a:bodyPr wrap="square"/>
+                    <a:lstStyle/>
+                    <a:p>
+                      <a:pPr algn="ctr"/>
+                      <a:r>
+                        <a:rPr sz="1250" b="1">
+                          <a:solidFill>
+                            <a:srgbClr val="FFFFFF"/>
+                          </a:solidFill>
+                          <a:latin typeface="Calibri"/>
+                        </a:rPr>
+                        <a:t>K8</a:t>
+                      </a:r>
+                    </a:p>
+                  </a:txBody>
+                  <a:tcPr marL="91440" marR="73152" marT="27432" marB="27432" anchor="ctr">
+                    <a:solidFill>
+                      <a:srgbClr val="21295C"/>
+                    </a:solidFill>
+                  </a:tcPr>
+                </a:tc>
+                <a:tc>
+                  <a:txBody>
+                    <a:bodyPr wrap="square"/>
+                    <a:lstStyle/>
+                    <a:p>
+                      <a:pPr algn="ctr"/>
+                      <a:r>
+                        <a:rPr sz="1250" b="1">
+                          <a:solidFill>
+                            <a:srgbClr val="FFFFFF"/>
+                          </a:solidFill>
+                          <a:latin typeface="Calibri"/>
+                        </a:rPr>
+                        <a:t>K16</a:t>
+                      </a:r>
+                    </a:p>
+                  </a:txBody>
+                  <a:tcPr marL="91440" marR="73152" marT="27432" marB="27432" anchor="ctr">
+                    <a:solidFill>
+                      <a:srgbClr val="21295C"/>
+                    </a:solidFill>
+                  </a:tcPr>
+                </a:tc>
+                <a:tc>
+                  <a:txBody>
+                    <a:bodyPr wrap="square"/>
+                    <a:lstStyle/>
+                    <a:p>
+                      <a:pPr algn="ctr"/>
+                      <a:r>
+                        <a:rPr sz="1250" b="1">
+                          <a:solidFill>
+                            <a:srgbClr val="FFFFFF"/>
+                          </a:solidFill>
+                          <a:latin typeface="Calibri"/>
+                        </a:rPr>
+                        <a:t>consensus</a:t>
+                      </a:r>
+                    </a:p>
+                  </a:txBody>
+                  <a:tcPr marL="91440" marR="73152" marT="27432" marB="27432" anchor="ctr">
+                    <a:solidFill>
+                      <a:srgbClr val="21295C"/>
+                    </a:solidFill>
+                  </a:tcPr>
+                </a:tc>
+              </a:tr>
+              <a:tr h="384048">
+                <a:tc>
+                  <a:txBody>
+                    <a:bodyPr wrap="square"/>
+                    <a:lstStyle/>
+                    <a:p>
+                      <a:pPr algn="l"/>
+                      <a:r>
+                        <a:rPr sz="1250" b="0">
+                          <a:solidFill>
+                            <a:srgbClr val="1A1F36"/>
+                          </a:solidFill>
+                          <a:latin typeface="Calibri"/>
+                        </a:rPr>
+                        <a:t>base</a:t>
+                      </a:r>
+                    </a:p>
+                  </a:txBody>
+                  <a:tcPr marL="91440" marR="73152" marT="27432" marB="27432" anchor="ctr">
+                    <a:solidFill>
+                      <a:srgbClr val="FFFFFF"/>
+                    </a:solidFill>
+                  </a:tcPr>
+                </a:tc>
+                <a:tc>
+                  <a:txBody>
+                    <a:bodyPr wrap="square"/>
+                    <a:lstStyle/>
+                    <a:p>
+                      <a:pPr algn="ctr"/>
+                      <a:r>
+                        <a:rPr sz="1250" b="1">
+                          <a:solidFill>
+                            <a:srgbClr val="E88B2F"/>
+                          </a:solidFill>
+                          <a:latin typeface="Calibri"/>
+                        </a:rPr>
+                        <a:t>0.3355</a:t>
+                      </a:r>
+                    </a:p>
+                  </a:txBody>
+                  <a:tcPr marL="91440" marR="73152" marT="27432" marB="27432" anchor="ctr">
+                    <a:solidFill>
+                      <a:srgbClr val="FFFFFF"/>
+                    </a:solidFill>
+                  </a:tcPr>
+                </a:tc>
+                <a:tc>
+                  <a:txBody>
+                    <a:bodyPr wrap="square"/>
+                    <a:lstStyle/>
+                    <a:p>
+                      <a:pPr algn="ctr"/>
+                      <a:r>
+                        <a:rPr sz="1250" b="0">
+                          <a:solidFill>
+                            <a:srgbClr val="1A1F36"/>
+                          </a:solidFill>
+                          <a:latin typeface="Calibri"/>
+                        </a:rPr>
+                        <a:t>0.1452</a:t>
+                      </a:r>
+                    </a:p>
+                  </a:txBody>
+                  <a:tcPr marL="91440" marR="73152" marT="27432" marB="27432" anchor="ctr">
+                    <a:solidFill>
+                      <a:srgbClr val="FFFFFF"/>
+                    </a:solidFill>
+                  </a:tcPr>
+                </a:tc>
+                <a:tc>
+                  <a:txBody>
+                    <a:bodyPr wrap="square"/>
+                    <a:lstStyle/>
+                    <a:p>
+                      <a:pPr algn="ctr"/>
+                      <a:r>
+                        <a:rPr sz="1250" b="0">
+                          <a:solidFill>
+                            <a:srgbClr val="1A1F36"/>
+                          </a:solidFill>
+                          <a:latin typeface="Calibri"/>
+                        </a:rPr>
+                        <a:t>0.1024</a:t>
+                      </a:r>
+                    </a:p>
+                  </a:txBody>
+                  <a:tcPr marL="91440" marR="73152" marT="27432" marB="27432" anchor="ctr">
+                    <a:solidFill>
+                      <a:srgbClr val="FFFFFF"/>
+                    </a:solidFill>
+                  </a:tcPr>
+                </a:tc>
+                <a:tc>
+                  <a:txBody>
+                    <a:bodyPr wrap="square"/>
+                    <a:lstStyle/>
+                    <a:p>
+                      <a:pPr algn="ctr"/>
+                      <a:r>
+                        <a:rPr sz="1250" b="0">
+                          <a:solidFill>
+                            <a:srgbClr val="1A1F36"/>
+                          </a:solidFill>
+                          <a:latin typeface="Calibri"/>
+                        </a:rPr>
+                        <a:t>0.0665</a:t>
+                      </a:r>
+                    </a:p>
+                  </a:txBody>
+                  <a:tcPr marL="91440" marR="73152" marT="27432" marB="27432" anchor="ctr">
+                    <a:solidFill>
+                      <a:srgbClr val="FFFFFF"/>
+                    </a:solidFill>
+                  </a:tcPr>
+                </a:tc>
+                <a:tc>
+                  <a:txBody>
+                    <a:bodyPr wrap="square"/>
+                    <a:lstStyle/>
+                    <a:p>
+                      <a:pPr algn="ctr"/>
+                      <a:r>
+                        <a:rPr sz="1250" b="0">
+                          <a:solidFill>
+                            <a:srgbClr val="1A1F36"/>
+                          </a:solidFill>
+                          <a:latin typeface="Calibri"/>
+                        </a:rPr>
+                        <a:t>0.0269</a:t>
+                      </a:r>
+                    </a:p>
+                  </a:txBody>
+                  <a:tcPr marL="91440" marR="73152" marT="27432" marB="27432" anchor="ctr">
+                    <a:solidFill>
+                      <a:srgbClr val="FFFFFF"/>
+                    </a:solidFill>
+                  </a:tcPr>
+                </a:tc>
+                <a:tc>
+                  <a:txBody>
+                    <a:bodyPr wrap="square"/>
+                    <a:lstStyle/>
+                    <a:p>
+                      <a:pPr algn="ctr"/>
+                      <a:r>
+                        <a:rPr sz="1250" b="0">
+                          <a:solidFill>
+                            <a:srgbClr val="1A1F36"/>
+                          </a:solidFill>
+                          <a:latin typeface="Calibri"/>
+                        </a:rPr>
+                        <a:t>0.0194</a:t>
+                      </a:r>
+                    </a:p>
+                  </a:txBody>
+                  <a:tcPr marL="91440" marR="73152" marT="27432" marB="27432" anchor="ctr">
+                    <a:solidFill>
+                      <a:srgbClr val="FFFFFF"/>
+                    </a:solidFill>
+                  </a:tcPr>
+                </a:tc>
+                <a:tc>
+                  <a:txBody>
+                    <a:bodyPr wrap="square"/>
+                    <a:lstStyle/>
+                    <a:p>
+                      <a:pPr algn="ctr"/>
+                      <a:r>
+                        <a:rPr sz="1250" b="0">
+                          <a:solidFill>
+                            <a:srgbClr val="1A1F36"/>
+                          </a:solidFill>
+                          <a:latin typeface="Calibri"/>
+                        </a:rPr>
+                        <a:t>0.2023</a:t>
+                      </a:r>
+                    </a:p>
+                  </a:txBody>
+                  <a:tcPr marL="91440" marR="73152" marT="27432" marB="27432" anchor="ctr">
+                    <a:solidFill>
+                      <a:srgbClr val="FFFFFF"/>
+                    </a:solidFill>
+                  </a:tcPr>
+                </a:tc>
+              </a:tr>
+              <a:tr h="384048">
+                <a:tc>
+                  <a:txBody>
+                    <a:bodyPr wrap="square"/>
+                    <a:lstStyle/>
+                    <a:p>
+                      <a:pPr algn="l"/>
+                      <a:r>
+                        <a:rPr sz="1250" b="0">
+                          <a:solidFill>
+                            <a:srgbClr val="1A1F36"/>
+                          </a:solidFill>
+                          <a:latin typeface="Calibri"/>
+                        </a:rPr>
+                        <a:t>refiner</a:t>
+                      </a:r>
+                    </a:p>
+                  </a:txBody>
+                  <a:tcPr marL="91440" marR="73152" marT="27432" marB="27432" anchor="ctr">
+                    <a:solidFill>
+                      <a:srgbClr val="F1F5F9"/>
+                    </a:solidFill>
+                  </a:tcPr>
+                </a:tc>
+                <a:tc>
+                  <a:txBody>
+                    <a:bodyPr wrap="square"/>
+                    <a:lstStyle/>
+                    <a:p>
+                      <a:pPr algn="ctr"/>
+                      <a:r>
+                        <a:rPr sz="1250" b="0">
+                          <a:solidFill>
+                            <a:srgbClr val="1A1F36"/>
+                          </a:solidFill>
+                          <a:latin typeface="Calibri"/>
+                        </a:rPr>
+                        <a:t>0.1978</a:t>
+                      </a:r>
+                    </a:p>
+                  </a:txBody>
+                  <a:tcPr marL="91440" marR="73152" marT="27432" marB="27432" anchor="ctr">
+                    <a:solidFill>
+                      <a:srgbClr val="F1F5F9"/>
+                    </a:solidFill>
+                  </a:tcPr>
+                </a:tc>
+                <a:tc>
+                  <a:txBody>
+                    <a:bodyPr wrap="square"/>
+                    <a:lstStyle/>
+                    <a:p>
+                      <a:pPr algn="ctr"/>
+                      <a:r>
+                        <a:rPr sz="1250" b="0">
+                          <a:solidFill>
+                            <a:srgbClr val="1A1F36"/>
+                          </a:solidFill>
+                          <a:latin typeface="Calibri"/>
+                        </a:rPr>
+                        <a:t>0.1555</a:t>
+                      </a:r>
+                    </a:p>
+                  </a:txBody>
+                  <a:tcPr marL="91440" marR="73152" marT="27432" marB="27432" anchor="ctr">
+                    <a:solidFill>
+                      <a:srgbClr val="F1F5F9"/>
+                    </a:solidFill>
+                  </a:tcPr>
+                </a:tc>
+                <a:tc>
+                  <a:txBody>
+                    <a:bodyPr wrap="square"/>
+                    <a:lstStyle/>
+                    <a:p>
+                      <a:pPr algn="ctr"/>
+                      <a:r>
+                        <a:rPr sz="1250" b="0">
+                          <a:solidFill>
+                            <a:srgbClr val="1A1F36"/>
+                          </a:solidFill>
+                          <a:latin typeface="Calibri"/>
+                        </a:rPr>
+                        <a:t>0.0813</a:t>
+                      </a:r>
+                    </a:p>
+                  </a:txBody>
+                  <a:tcPr marL="91440" marR="73152" marT="27432" marB="27432" anchor="ctr">
+                    <a:solidFill>
+                      <a:srgbClr val="F1F5F9"/>
+                    </a:solidFill>
+                  </a:tcPr>
+                </a:tc>
+                <a:tc>
+                  <a:txBody>
+                    <a:bodyPr wrap="square"/>
+                    <a:lstStyle/>
+                    <a:p>
+                      <a:pPr algn="ctr"/>
+                      <a:r>
+                        <a:rPr sz="1250" b="0">
+                          <a:solidFill>
+                            <a:srgbClr val="1A1F36"/>
+                          </a:solidFill>
+                          <a:latin typeface="Calibri"/>
+                        </a:rPr>
+                        <a:t>0.0383</a:t>
+                      </a:r>
+                    </a:p>
+                  </a:txBody>
+                  <a:tcPr marL="91440" marR="73152" marT="27432" marB="27432" anchor="ctr">
+                    <a:solidFill>
+                      <a:srgbClr val="F1F5F9"/>
+                    </a:solidFill>
+                  </a:tcPr>
+                </a:tc>
+                <a:tc>
+                  <a:txBody>
+                    <a:bodyPr wrap="square"/>
+                    <a:lstStyle/>
+                    <a:p>
+                      <a:pPr algn="ctr"/>
+                      <a:r>
+                        <a:rPr sz="1250" b="0">
+                          <a:solidFill>
+                            <a:srgbClr val="1A1F36"/>
+                          </a:solidFill>
+                          <a:latin typeface="Calibri"/>
+                        </a:rPr>
+                        <a:t>0.0211</a:t>
+                      </a:r>
+                    </a:p>
+                  </a:txBody>
+                  <a:tcPr marL="91440" marR="73152" marT="27432" marB="27432" anchor="ctr">
+                    <a:solidFill>
+                      <a:srgbClr val="F1F5F9"/>
+                    </a:solidFill>
+                  </a:tcPr>
+                </a:tc>
+                <a:tc>
+                  <a:txBody>
+                    <a:bodyPr wrap="square"/>
+                    <a:lstStyle/>
+                    <a:p>
+                      <a:pPr algn="ctr"/>
+                      <a:r>
+                        <a:rPr sz="1250" b="0">
+                          <a:solidFill>
+                            <a:srgbClr val="1A1F36"/>
+                          </a:solidFill>
+                          <a:latin typeface="Calibri"/>
+                        </a:rPr>
+                        <a:t>0.0165</a:t>
+                      </a:r>
+                    </a:p>
+                  </a:txBody>
+                  <a:tcPr marL="91440" marR="73152" marT="27432" marB="27432" anchor="ctr">
+                    <a:solidFill>
+                      <a:srgbClr val="F1F5F9"/>
+                    </a:solidFill>
+                  </a:tcPr>
+                </a:tc>
+                <a:tc>
+                  <a:txBody>
+                    <a:bodyPr wrap="square"/>
+                    <a:lstStyle/>
+                    <a:p>
+                      <a:pPr algn="ctr"/>
+                      <a:r>
+                        <a:rPr sz="1250" b="1">
+                          <a:solidFill>
+                            <a:srgbClr val="E88B2F"/>
+                          </a:solidFill>
+                          <a:latin typeface="Calibri"/>
+                        </a:rPr>
+                        <a:t>0.2220</a:t>
+                      </a:r>
+                    </a:p>
+                  </a:txBody>
+                  <a:tcPr marL="91440" marR="73152" marT="27432" marB="27432" anchor="ctr">
+                    <a:solidFill>
+                      <a:srgbClr val="F1F5F9"/>
+                    </a:solidFill>
+                  </a:tcPr>
+                </a:tc>
+              </a:tr>
+              <a:tr h="384048">
+                <a:tc>
+                  <a:txBody>
+                    <a:bodyPr wrap="square"/>
+                    <a:lstStyle/>
+                    <a:p>
+                      <a:pPr algn="l"/>
+                      <a:r>
+                        <a:rPr sz="1250" b="0">
+                          <a:solidFill>
+                            <a:srgbClr val="1A1F36"/>
+                          </a:solidFill>
+                          <a:latin typeface="Calibri"/>
+                        </a:rPr>
+                        <a:t>candidate contacts</a:t>
+                      </a:r>
+                    </a:p>
+                  </a:txBody>
+                  <a:tcPr marL="91440" marR="73152" marT="27432" marB="27432" anchor="ctr">
+                    <a:solidFill>
+                      <a:srgbClr val="FFFFFF"/>
+                    </a:solidFill>
+                  </a:tcPr>
+                </a:tc>
+                <a:tc>
+                  <a:txBody>
+                    <a:bodyPr wrap="square"/>
+                    <a:lstStyle/>
+                    <a:p>
+                      <a:pPr algn="ctr"/>
+                      <a:r>
+                        <a:rPr sz="1250" b="0">
+                          <a:solidFill>
+                            <a:srgbClr val="1A1F36"/>
+                          </a:solidFill>
+                          <a:latin typeface="Calibri"/>
+                        </a:rPr>
+                        <a:t>0</a:t>
+                      </a:r>
+                    </a:p>
+                  </a:txBody>
+                  <a:tcPr marL="91440" marR="73152" marT="27432" marB="27432" anchor="ctr">
+                    <a:solidFill>
+                      <a:srgbClr val="FFFFFF"/>
+                    </a:solidFill>
+                  </a:tcPr>
+                </a:tc>
+                <a:tc>
+                  <a:txBody>
+                    <a:bodyPr wrap="square"/>
+                    <a:lstStyle/>
+                    <a:p>
+                      <a:pPr algn="ctr"/>
+                      <a:r>
+                        <a:rPr sz="1250" b="0">
+                          <a:solidFill>
+                            <a:srgbClr val="1A1F36"/>
+                          </a:solidFill>
+                          <a:latin typeface="Calibri"/>
+                        </a:rPr>
+                        <a:t>98</a:t>
+                      </a:r>
+                    </a:p>
+                  </a:txBody>
+                  <a:tcPr marL="91440" marR="73152" marT="27432" marB="27432" anchor="ctr">
+                    <a:solidFill>
+                      <a:srgbClr val="FFFFFF"/>
+                    </a:solidFill>
+                  </a:tcPr>
+                </a:tc>
+                <a:tc>
+                  <a:txBody>
+                    <a:bodyPr wrap="square"/>
+                    <a:lstStyle/>
+                    <a:p>
+                      <a:pPr algn="ctr"/>
+                      <a:r>
+                        <a:rPr sz="1250" b="0">
+                          <a:solidFill>
+                            <a:srgbClr val="1A1F36"/>
+                          </a:solidFill>
+                          <a:latin typeface="Calibri"/>
+                        </a:rPr>
+                        <a:t>195</a:t>
+                      </a:r>
+                    </a:p>
+                  </a:txBody>
+                  <a:tcPr marL="91440" marR="73152" marT="27432" marB="27432" anchor="ctr">
+                    <a:solidFill>
+                      <a:srgbClr val="FFFFFF"/>
+                    </a:solidFill>
+                  </a:tcPr>
+                </a:tc>
+                <a:tc>
+                  <a:txBody>
+                    <a:bodyPr wrap="square"/>
+                    <a:lstStyle/>
+                    <a:p>
+                      <a:pPr algn="ctr"/>
+                      <a:r>
+                        <a:rPr sz="1250" b="0">
+                          <a:solidFill>
+                            <a:srgbClr val="1A1F36"/>
+                          </a:solidFill>
+                          <a:latin typeface="Calibri"/>
+                        </a:rPr>
+                        <a:t>391</a:t>
+                      </a:r>
+                    </a:p>
+                  </a:txBody>
+                  <a:tcPr marL="91440" marR="73152" marT="27432" marB="27432" anchor="ctr">
+                    <a:solidFill>
+                      <a:srgbClr val="FFFFFF"/>
+                    </a:solidFill>
+                  </a:tcPr>
+                </a:tc>
+                <a:tc>
+                  <a:txBody>
+                    <a:bodyPr wrap="square"/>
+                    <a:lstStyle/>
+                    <a:p>
+                      <a:pPr algn="ctr"/>
+                      <a:r>
+                        <a:rPr sz="1250" b="0">
+                          <a:solidFill>
+                            <a:srgbClr val="1A1F36"/>
+                          </a:solidFill>
+                          <a:latin typeface="Calibri"/>
+                        </a:rPr>
+                        <a:t>780</a:t>
+                      </a:r>
+                    </a:p>
+                  </a:txBody>
+                  <a:tcPr marL="91440" marR="73152" marT="27432" marB="27432" anchor="ctr">
+                    <a:solidFill>
+                      <a:srgbClr val="FFFFFF"/>
+                    </a:solidFill>
+                  </a:tcPr>
+                </a:tc>
+                <a:tc>
+                  <a:txBody>
+                    <a:bodyPr wrap="square"/>
+                    <a:lstStyle/>
+                    <a:p>
+                      <a:pPr algn="ctr"/>
+                      <a:r>
+                        <a:rPr sz="1250" b="0">
+                          <a:solidFill>
+                            <a:srgbClr val="1A1F36"/>
+                          </a:solidFill>
+                          <a:latin typeface="Calibri"/>
+                        </a:rPr>
+                        <a:t>1557</a:t>
+                      </a:r>
+                    </a:p>
+                  </a:txBody>
+                  <a:tcPr marL="91440" marR="73152" marT="27432" marB="27432" anchor="ctr">
+                    <a:solidFill>
+                      <a:srgbClr val="FFFFFF"/>
+                    </a:solidFill>
+                  </a:tcPr>
+                </a:tc>
+                <a:tc>
+                  <a:txBody>
+                    <a:bodyPr wrap="square"/>
+                    <a:lstStyle/>
+                    <a:p>
+                      <a:pPr algn="ctr"/>
+                      <a:r>
+                        <a:rPr sz="1250" b="0">
+                          <a:solidFill>
+                            <a:srgbClr val="1A1F36"/>
+                          </a:solidFill>
+                          <a:latin typeface="Calibri"/>
+                        </a:rPr>
+                        <a:t>58</a:t>
+                      </a:r>
+                    </a:p>
+                  </a:txBody>
+                  <a:tcPr marL="91440" marR="73152" marT="27432" marB="27432" anchor="ctr">
+                    <a:solidFill>
+                      <a:srgbClr val="FFFFFF"/>
+                    </a:solidFill>
+                  </a:tcPr>
+                </a:tc>
+              </a:tr>
+            </a:tbl>
+          </a:graphicData>
+        </a:graphic>
+      </p:graphicFrame>
+      <p:sp>
+        <p:nvSpPr>
+          <p:cNvPr id="5" name="Rounded Rectangle 4"/>
           <p:cNvSpPr/>
           <p:nvPr/>
         </p:nvSpPr>
         <p:spPr>
           <a:xfrm>
-            <a:off x="822960" y="1965960"/>
-            <a:ext cx="5120640" cy="2148840"/>
+            <a:off x="685800" y="3566160"/>
+            <a:ext cx="5257800" cy="1143000"/>
           </a:xfrm>
           <a:prstGeom prst="roundRect">
             <a:avLst>
@@ -6994,7 +8006,7 @@
             </a:avLst>
           </a:prstGeom>
           <a:solidFill>
-            <a:srgbClr val="F1F5F9"/>
+            <a:srgbClr val="FAECE9"/>
           </a:solidFill>
           <a:ln>
             <a:noFill/>
@@ -7023,14 +8035,14 @@
       </p:sp>
       <p:sp>
         <p:nvSpPr>
-          <p:cNvPr id="5" name="TextBox 4"/>
+          <p:cNvPr id="6" name="TextBox 5"/>
           <p:cNvSpPr txBox="1"/>
           <p:nvPr/>
         </p:nvSpPr>
         <p:spPr>
           <a:xfrm>
-            <a:off x="1097280" y="2194560"/>
-            <a:ext cx="4572000" cy="411480"/>
+            <a:off x="960120" y="3749039"/>
+            <a:ext cx="4709160" cy="777240"/>
           </a:xfrm>
           <a:prstGeom prst="rect">
             <a:avLst/>
@@ -7049,93 +8061,13 @@
               </a:lnSpc>
             </a:pPr>
             <a:r>
-              <a:rPr sz="1600" b="1" i="0">
-                <a:solidFill>
-                  <a:srgbClr val="21295C"/>
+              <a:rPr sz="1350" b="1" i="0">
+                <a:solidFill>
+                  <a:srgbClr val="8E3A2C"/>
                 </a:solidFill>
                 <a:latin typeface="Calibri"/>
               </a:rPr>
-              <a:t>Dispatched</a:t>
-            </a:r>
-          </a:p>
-        </p:txBody>
-      </p:sp>
-      <p:sp>
-        <p:nvSpPr>
-          <p:cNvPr id="6" name="TextBox 5"/>
-          <p:cNvSpPr txBox="1"/>
-          <p:nvPr/>
-        </p:nvSpPr>
-        <p:spPr>
-          <a:xfrm>
-            <a:off x="1097280" y="2697480"/>
-            <a:ext cx="4572000" cy="1280160"/>
-          </a:xfrm>
-          <a:prstGeom prst="rect">
-            <a:avLst/>
-          </a:prstGeom>
-          <a:noFill/>
-        </p:spPr>
-        <p:txBody>
-          <a:bodyPr wrap="square" lIns="0" rIns="0" tIns="0" bIns="0">
-            <a:spAutoFit/>
-          </a:bodyPr>
-          <a:lstStyle/>
-          <a:p>
-            <a:pPr>
-              <a:lnSpc>
-                <a:spcPct val="115000"/>
-              </a:lnSpc>
-              <a:spcAft>
-                <a:spcPts val="700"/>
-              </a:spcAft>
-            </a:pPr>
-            <a:r>
-              <a:rPr sz="1200">
-                <a:solidFill>
-                  <a:srgbClr val="1A1F36"/>
-                </a:solidFill>
-                <a:latin typeface="Calibri"/>
-              </a:rPr>
-              <a:t>554 eval targets (sequences from exp74/exp78 manifests, GT from exp89's gt_universe)</a:t>
-            </a:r>
-          </a:p>
-          <a:p>
-            <a:pPr>
-              <a:lnSpc>
-                <a:spcPct val="115000"/>
-              </a:lnSpc>
-              <a:spcAft>
-                <a:spcPts val="700"/>
-              </a:spcAft>
-            </a:pPr>
-            <a:r>
-              <a:rPr sz="1200">
-                <a:solidFill>
-                  <a:srgbClr val="1A1F36"/>
-                </a:solidFill>
-                <a:latin typeface="Calibri"/>
-              </a:rPr>
-              <a:t>24 prompts each · 8 × 1×H100 · batch band</a:t>
-            </a:r>
-          </a:p>
-          <a:p>
-            <a:pPr>
-              <a:lnSpc>
-                <a:spcPct val="115000"/>
-              </a:lnSpc>
-              <a:spcAft>
-                <a:spcPts val="700"/>
-              </a:spcAft>
-            </a:pPr>
-            <a:r>
-              <a:rPr sz="1200">
-                <a:solidFill>
-                  <a:srgbClr val="1A1F36"/>
-                </a:solidFill>
-                <a:latin typeface="Calibri"/>
-              </a:rPr>
-              <a:t>GT filtered by exp89's own definition, so it is bit-identical to what the metric scores</a:t>
+              <a:t>Kill criterion MET. The base model's one-shot matrix (0.3355) is still the best deployable prediction; the refiner's best arm is 0.2220.</a:t>
             </a:r>
           </a:p>
         </p:txBody>
@@ -7148,8 +8080,8 @@
         </p:nvSpPr>
         <p:spPr>
           <a:xfrm>
-            <a:off x="6263640" y="1965960"/>
-            <a:ext cx="5120640" cy="2148840"/>
+            <a:off x="6263640" y="3566160"/>
+            <a:ext cx="5257800" cy="1143000"/>
           </a:xfrm>
           <a:prstGeom prst="roundRect">
             <a:avLst>
@@ -7192,8 +8124,8 @@
         </p:nvSpPr>
         <p:spPr>
           <a:xfrm>
-            <a:off x="6537960" y="2194560"/>
-            <a:ext cx="4572000" cy="411480"/>
+            <a:off x="6537960" y="3749039"/>
+            <a:ext cx="4709160" cy="777240"/>
           </a:xfrm>
           <a:prstGeom prst="rect">
             <a:avLst/>
@@ -7212,13 +8144,13 @@
               </a:lnSpc>
             </a:pPr>
             <a:r>
-              <a:rPr sz="1600" b="1" i="0">
-                <a:solidFill>
-                  <a:srgbClr val="2E7D5B"/>
+              <a:rPr sz="1350" b="1" i="0">
+                <a:solidFill>
+                  <a:srgbClr val="22503E"/>
                 </a:solidFill>
                 <a:latin typeface="Calibri"/>
               </a:rPr>
-              <a:t>No leakage</a:t>
+              <a:t>But raw blocks hurt BOTH models monotonically — even at K=1, comfortably in-distribution. Only the precision-filtered consensus block helps.</a:t>
             </a:r>
           </a:p>
         </p:txBody>
@@ -7231,8 +8163,8 @@
         </p:nvSpPr>
         <p:spPr>
           <a:xfrm>
-            <a:off x="6537960" y="2697480"/>
-            <a:ext cx="4572000" cy="1280160"/>
+            <a:off x="685800" y="4983480"/>
+            <a:ext cx="10835640" cy="411480"/>
           </a:xfrm>
           <a:prstGeom prst="rect">
             <a:avLst/>
@@ -7251,13 +8183,13 @@
               </a:lnSpc>
             </a:pPr>
             <a:r>
-              <a:rPr sz="1250" b="0" i="0">
-                <a:solidFill>
-                  <a:srgbClr val="22503E"/>
+              <a:rPr sz="1300" b="0" i="1">
+                <a:solidFill>
+                  <a:srgbClr val="6B748C"/>
                 </a:solidFill>
                 <a:latin typeface="Calibri"/>
               </a:rPr>
-              <a:t>The training corpus uses ESM-Atlas MD5 entry ids — a disjoint universe from exp89's PDB-derived stems. Disjointness holds by construction, not by filtering.</a:t>
+              <a:t>Harness check: base K0 = 0.3355 vs exp89's published E8 value of 0.3389.</a:t>
             </a:r>
           </a:p>
         </p:txBody>
@@ -7270,8 +8202,8 @@
         </p:nvSpPr>
         <p:spPr>
           <a:xfrm>
-            <a:off x="822960" y="4389120"/>
-            <a:ext cx="10515600" cy="411480"/>
+            <a:off x="640080" y="6291072"/>
+            <a:ext cx="10911535" cy="320040"/>
           </a:xfrm>
           <a:prstGeom prst="rect">
             <a:avLst/>
@@ -7290,33 +8222,157 @@
               </a:lnSpc>
             </a:pPr>
             <a:r>
-              <a:rPr sz="1700" b="1" i="0">
+              <a:rPr sz="1050" b="0" i="1">
+                <a:solidFill>
+                  <a:srgbClr val="6B748C"/>
+                </a:solidFill>
+                <a:latin typeface="Calibri"/>
+              </a:rPr>
+              <a:t>R-precision, all band. Long band tells the same story (base K0 0.2697, refiner consensus 0.1767).</a:t>
+            </a:r>
+          </a:p>
+        </p:txBody>
+      </p:sp>
+    </p:spTree>
+  </p:cSld>
+  <p:clrMapOvr>
+    <a:masterClrMapping/>
+  </p:clrMapOvr>
+</p:sld>
+</file>
+
+<file path=ppt/slides/slide15.xml><?xml version="1.0" encoding="utf-8"?>
+<p:sld xmlns:a="http://schemas.openxmlformats.org/drawingml/2006/main" xmlns:p="http://schemas.openxmlformats.org/presentationml/2006/main" xmlns:r="http://schemas.openxmlformats.org/officeDocument/2006/relationships">
+  <p:cSld>
+    <p:bg>
+      <p:bgPr>
+        <a:solidFill>
+          <a:srgbClr val="FFFFFF"/>
+        </a:solidFill>
+        <a:effectLst/>
+      </p:bgPr>
+    </p:bg>
+    <p:spTree>
+      <p:nvGrpSpPr>
+        <p:cNvPr id="1" name=""/>
+        <p:cNvGrpSpPr/>
+        <p:nvPr/>
+      </p:nvGrpSpPr>
+      <p:grpSpPr/>
+      <p:sp>
+        <p:nvSpPr>
+          <p:cNvPr id="2" name="TextBox 1"/>
+          <p:cNvSpPr txBox="1"/>
+          <p:nvPr/>
+        </p:nvSpPr>
+        <p:spPr>
+          <a:xfrm>
+            <a:off x="640080" y="457200"/>
+            <a:ext cx="10911535" cy="777240"/>
+          </a:xfrm>
+          <a:prstGeom prst="rect">
+            <a:avLst/>
+          </a:prstGeom>
+          <a:noFill/>
+        </p:spPr>
+        <p:txBody>
+          <a:bodyPr wrap="square" lIns="0" rIns="0" tIns="0" bIns="0" anchor="t">
+            <a:spAutoFit/>
+          </a:bodyPr>
+          <a:lstStyle/>
+          <a:p>
+            <a:pPr algn="l">
+              <a:lnSpc>
+                <a:spcPct val="100000"/>
+              </a:lnSpc>
+            </a:pPr>
+            <a:r>
+              <a:rPr sz="3400" b="1" i="0">
                 <a:solidFill>
                   <a:srgbClr val="21295C"/>
                 </a:solidFill>
                 <a:latin typeface="Cambria"/>
               </a:rPr>
-              <a:t>Success criteria</a:t>
-            </a:r>
-          </a:p>
-        </p:txBody>
-      </p:sp>
-      <p:sp>
-        <p:nvSpPr>
-          <p:cNvPr id="11" name="Oval 10"/>
+              <a:t>The mechanism does work</a:t>
+            </a:r>
+          </a:p>
+        </p:txBody>
+      </p:sp>
+      <p:sp>
+        <p:nvSpPr>
+          <p:cNvPr id="3" name="TextBox 2"/>
+          <p:cNvSpPr txBox="1"/>
+          <p:nvPr/>
+        </p:nvSpPr>
+        <p:spPr>
+          <a:xfrm>
+            <a:off x="640080" y="1207008"/>
+            <a:ext cx="10911535" cy="457200"/>
+          </a:xfrm>
+          <a:prstGeom prst="rect">
+            <a:avLst/>
+          </a:prstGeom>
+          <a:noFill/>
+        </p:spPr>
+        <p:txBody>
+          <a:bodyPr wrap="square" lIns="0" rIns="0" tIns="0" bIns="0" anchor="t">
+            <a:spAutoFit/>
+          </a:bodyPr>
+          <a:lstStyle/>
+          <a:p>
+            <a:pPr algn="l">
+              <a:lnSpc>
+                <a:spcPct val="100000"/>
+              </a:lnSpc>
+            </a:pPr>
+            <a:r>
+              <a:rPr sz="1500" b="0" i="1">
+                <a:solidFill>
+                  <a:srgbClr val="6B748C"/>
+                </a:solidFill>
+                <a:latin typeface="Calibri"/>
+              </a:rPr>
+              <a:t>Same 56.7%-precision consensus block, fed to both models.</a:t>
+            </a:r>
+          </a:p>
+        </p:txBody>
+      </p:sp>
+      <p:graphicFrame>
+        <p:nvGraphicFramePr>
+          <p:cNvPr id="4" name="Chart 3"/>
+          <p:cNvGraphicFramePr>
+            <a:graphicFrameLocks noGrp="1"/>
+          </p:cNvGraphicFramePr>
+          <p:nvPr/>
+        </p:nvGraphicFramePr>
+        <p:xfrm>
+          <a:off x="822960" y="1920240"/>
+          <a:ext cx="6400800" cy="3566160"/>
+        </p:xfrm>
+        <a:graphic>
+          <a:graphicData uri="http://schemas.openxmlformats.org/drawingml/2006/chart">
+            <c:chart xmlns:c="http://schemas.openxmlformats.org/drawingml/2006/chart" r:id="rId2"/>
+          </a:graphicData>
+        </a:graphic>
+      </p:graphicFrame>
+      <p:sp>
+        <p:nvSpPr>
+          <p:cNvPr id="5" name="Rounded Rectangle 4"/>
           <p:cNvSpPr/>
           <p:nvPr/>
         </p:nvSpPr>
         <p:spPr>
           <a:xfrm>
-            <a:off x="822960" y="4892040"/>
-            <a:ext cx="329184" cy="329184"/>
-          </a:xfrm>
-          <a:prstGeom prst="ellipse">
-            <a:avLst/>
+            <a:off x="7589520" y="1965960"/>
+            <a:ext cx="3794760" cy="1554480"/>
+          </a:xfrm>
+          <a:prstGeom prst="roundRect">
+            <a:avLst>
+              <a:gd name="adj" fmla="val 6000"/>
+            </a:avLst>
           </a:prstGeom>
           <a:solidFill>
-            <a:srgbClr val="1C7293"/>
+            <a:srgbClr val="FAECE9"/>
           </a:solidFill>
           <a:ln>
             <a:noFill/>
@@ -7340,30 +8396,19 @@
         <p:txBody>
           <a:bodyPr rtlCol="0" anchor="ctr"/>
           <a:lstStyle/>
-          <a:p>
-            <a:pPr algn="ctr"/>
-            <a:r>
-              <a:rPr sz="1700" b="1">
-                <a:solidFill>
-                  <a:srgbClr val="FFFFFF"/>
-                </a:solidFill>
-                <a:latin typeface="Calibri"/>
-              </a:rPr>
-              <a:t>1</a:t>
-            </a:r>
-          </a:p>
-        </p:txBody>
-      </p:sp>
-      <p:sp>
-        <p:nvSpPr>
-          <p:cNvPr id="12" name="TextBox 11"/>
+          <a:p/>
+        </p:txBody>
+      </p:sp>
+      <p:sp>
+        <p:nvSpPr>
+          <p:cNvPr id="6" name="TextBox 5"/>
           <p:cNvSpPr txBox="1"/>
           <p:nvPr/>
         </p:nvSpPr>
         <p:spPr>
           <a:xfrm>
-            <a:off x="1298448" y="4919472"/>
-            <a:ext cx="9966960" cy="411480"/>
+            <a:off x="7863840" y="2157984"/>
+            <a:ext cx="3291840" cy="384048"/>
           </a:xfrm>
           <a:prstGeom prst="rect">
             <a:avLst/>
@@ -7382,33 +8427,113 @@
               </a:lnSpc>
             </a:pPr>
             <a:r>
-              <a:rPr sz="1350" b="0" i="0">
-                <a:solidFill>
-                  <a:srgbClr val="1A1F36"/>
+              <a:rPr sz="1300" b="1" i="0">
+                <a:solidFill>
+                  <a:srgbClr val="C44536"/>
                 </a:solidFill>
                 <a:latin typeface="Calibri"/>
               </a:rPr>
-              <a:t>refiner@K16 &gt; refiner@K0 — it uses candidates without being poisoned</a:t>
-            </a:r>
-          </a:p>
-        </p:txBody>
-      </p:sp>
-      <p:sp>
-        <p:nvSpPr>
-          <p:cNvPr id="13" name="Oval 12"/>
+              <a:t>base: POISONED</a:t>
+            </a:r>
+          </a:p>
+        </p:txBody>
+      </p:sp>
+      <p:sp>
+        <p:nvSpPr>
+          <p:cNvPr id="7" name="TextBox 6"/>
+          <p:cNvSpPr txBox="1"/>
+          <p:nvPr/>
+        </p:nvSpPr>
+        <p:spPr>
+          <a:xfrm>
+            <a:off x="7863840" y="2542032"/>
+            <a:ext cx="3291840" cy="640080"/>
+          </a:xfrm>
+          <a:prstGeom prst="rect">
+            <a:avLst/>
+          </a:prstGeom>
+          <a:noFill/>
+        </p:spPr>
+        <p:txBody>
+          <a:bodyPr wrap="square" lIns="0" rIns="0" tIns="0" bIns="0" anchor="t">
+            <a:spAutoFit/>
+          </a:bodyPr>
+          <a:lstStyle/>
+          <a:p>
+            <a:pPr algn="l">
+              <a:lnSpc>
+                <a:spcPct val="100000"/>
+              </a:lnSpc>
+            </a:pPr>
+            <a:r>
+              <a:rPr sz="3200" b="1" i="0">
+                <a:solidFill>
+                  <a:srgbClr val="C44536"/>
+                </a:solidFill>
+                <a:latin typeface="Cambria"/>
+              </a:rPr>
+              <a:t>-0.133</a:t>
+            </a:r>
+          </a:p>
+        </p:txBody>
+      </p:sp>
+      <p:sp>
+        <p:nvSpPr>
+          <p:cNvPr id="8" name="TextBox 7"/>
+          <p:cNvSpPr txBox="1"/>
+          <p:nvPr/>
+        </p:nvSpPr>
+        <p:spPr>
+          <a:xfrm>
+            <a:off x="7863840" y="3090672"/>
+            <a:ext cx="3291840" cy="365760"/>
+          </a:xfrm>
+          <a:prstGeom prst="rect">
+            <a:avLst/>
+          </a:prstGeom>
+          <a:noFill/>
+        </p:spPr>
+        <p:txBody>
+          <a:bodyPr wrap="square" lIns="0" rIns="0" tIns="0" bIns="0" anchor="t">
+            <a:spAutoFit/>
+          </a:bodyPr>
+          <a:lstStyle/>
+          <a:p>
+            <a:pPr algn="l">
+              <a:lnSpc>
+                <a:spcPct val="100000"/>
+              </a:lnSpc>
+            </a:pPr>
+            <a:r>
+              <a:rPr sz="1150" b="0" i="0">
+                <a:solidFill>
+                  <a:srgbClr val="8E3A2C"/>
+                </a:solidFill>
+                <a:latin typeface="Calibri"/>
+              </a:rPr>
+              <a:t>gains on only 8% of proteins</a:t>
+            </a:r>
+          </a:p>
+        </p:txBody>
+      </p:sp>
+      <p:sp>
+        <p:nvSpPr>
+          <p:cNvPr id="9" name="Rounded Rectangle 8"/>
           <p:cNvSpPr/>
           <p:nvPr/>
         </p:nvSpPr>
         <p:spPr>
           <a:xfrm>
-            <a:off x="822960" y="5394959"/>
-            <a:ext cx="329184" cy="329184"/>
-          </a:xfrm>
-          <a:prstGeom prst="ellipse">
-            <a:avLst/>
+            <a:off x="7589520" y="3657600"/>
+            <a:ext cx="3794760" cy="1554480"/>
+          </a:xfrm>
+          <a:prstGeom prst="roundRect">
+            <a:avLst>
+              <a:gd name="adj" fmla="val 6000"/>
+            </a:avLst>
           </a:prstGeom>
           <a:solidFill>
-            <a:srgbClr val="1C7293"/>
+            <a:srgbClr val="E8F3EE"/>
           </a:solidFill>
           <a:ln>
             <a:noFill/>
@@ -7432,30 +8557,19 @@
         <p:txBody>
           <a:bodyPr rtlCol="0" anchor="ctr"/>
           <a:lstStyle/>
-          <a:p>
-            <a:pPr algn="ctr"/>
-            <a:r>
-              <a:rPr sz="1700" b="1">
-                <a:solidFill>
-                  <a:srgbClr val="FFFFFF"/>
-                </a:solidFill>
-                <a:latin typeface="Calibri"/>
-              </a:rPr>
-              <a:t>2</a:t>
-            </a:r>
-          </a:p>
-        </p:txBody>
-      </p:sp>
-      <p:sp>
-        <p:nvSpPr>
-          <p:cNvPr id="14" name="TextBox 13"/>
+          <a:p/>
+        </p:txBody>
+      </p:sp>
+      <p:sp>
+        <p:nvSpPr>
+          <p:cNvPr id="10" name="TextBox 9"/>
           <p:cNvSpPr txBox="1"/>
           <p:nvPr/>
         </p:nvSpPr>
         <p:spPr>
           <a:xfrm>
-            <a:off x="1298448" y="5422392"/>
-            <a:ext cx="9966960" cy="411480"/>
+            <a:off x="7863840" y="3849624"/>
+            <a:ext cx="3291840" cy="384048"/>
           </a:xfrm>
           <a:prstGeom prst="rect">
             <a:avLst/>
@@ -7474,33 +8588,113 @@
               </a:lnSpc>
             </a:pPr>
             <a:r>
-              <a:rPr sz="1350" b="0" i="0">
-                <a:solidFill>
-                  <a:srgbClr val="1A1F36"/>
+              <a:rPr sz="1300" b="1" i="0">
+                <a:solidFill>
+                  <a:srgbClr val="2E7D5B"/>
                 </a:solidFill>
                 <a:latin typeface="Calibri"/>
               </a:rPr>
-              <a:t>refiner@K &gt; max(base matrix, consensus) ≈ 0.22 — it is worth it</a:t>
-            </a:r>
-          </a:p>
-        </p:txBody>
-      </p:sp>
-      <p:sp>
-        <p:nvSpPr>
-          <p:cNvPr id="15" name="Oval 14"/>
+              <a:t>refiner: USES IT</a:t>
+            </a:r>
+          </a:p>
+        </p:txBody>
+      </p:sp>
+      <p:sp>
+        <p:nvSpPr>
+          <p:cNvPr id="11" name="TextBox 10"/>
+          <p:cNvSpPr txBox="1"/>
+          <p:nvPr/>
+        </p:nvSpPr>
+        <p:spPr>
+          <a:xfrm>
+            <a:off x="7863840" y="4233672"/>
+            <a:ext cx="3291840" cy="640080"/>
+          </a:xfrm>
+          <a:prstGeom prst="rect">
+            <a:avLst/>
+          </a:prstGeom>
+          <a:noFill/>
+        </p:spPr>
+        <p:txBody>
+          <a:bodyPr wrap="square" lIns="0" rIns="0" tIns="0" bIns="0" anchor="t">
+            <a:spAutoFit/>
+          </a:bodyPr>
+          <a:lstStyle/>
+          <a:p>
+            <a:pPr algn="l">
+              <a:lnSpc>
+                <a:spcPct val="100000"/>
+              </a:lnSpc>
+            </a:pPr>
+            <a:r>
+              <a:rPr sz="3200" b="1" i="0">
+                <a:solidFill>
+                  <a:srgbClr val="2E7D5B"/>
+                </a:solidFill>
+                <a:latin typeface="Cambria"/>
+              </a:rPr>
+              <a:t>+0.024</a:t>
+            </a:r>
+          </a:p>
+        </p:txBody>
+      </p:sp>
+      <p:sp>
+        <p:nvSpPr>
+          <p:cNvPr id="12" name="TextBox 11"/>
+          <p:cNvSpPr txBox="1"/>
+          <p:nvPr/>
+        </p:nvSpPr>
+        <p:spPr>
+          <a:xfrm>
+            <a:off x="7863840" y="4782312"/>
+            <a:ext cx="3291840" cy="365760"/>
+          </a:xfrm>
+          <a:prstGeom prst="rect">
+            <a:avLst/>
+          </a:prstGeom>
+          <a:noFill/>
+        </p:spPr>
+        <p:txBody>
+          <a:bodyPr wrap="square" lIns="0" rIns="0" tIns="0" bIns="0" anchor="t">
+            <a:spAutoFit/>
+          </a:bodyPr>
+          <a:lstStyle/>
+          <a:p>
+            <a:pPr algn="l">
+              <a:lnSpc>
+                <a:spcPct val="100000"/>
+              </a:lnSpc>
+            </a:pPr>
+            <a:r>
+              <a:rPr sz="1150" b="0" i="0">
+                <a:solidFill>
+                  <a:srgbClr val="2E5D4A"/>
+                </a:solidFill>
+                <a:latin typeface="Calibri"/>
+              </a:rPr>
+              <a:t>gains on 63% of proteins</a:t>
+            </a:r>
+          </a:p>
+        </p:txBody>
+      </p:sp>
+      <p:sp>
+        <p:nvSpPr>
+          <p:cNvPr id="13" name="Rounded Rectangle 12"/>
           <p:cNvSpPr/>
           <p:nvPr/>
         </p:nvSpPr>
         <p:spPr>
           <a:xfrm>
-            <a:off x="822960" y="5897879"/>
-            <a:ext cx="329184" cy="329184"/>
-          </a:xfrm>
-          <a:prstGeom prst="ellipse">
-            <a:avLst/>
+            <a:off x="822960" y="5669280"/>
+            <a:ext cx="10561320" cy="731520"/>
+          </a:xfrm>
+          <a:prstGeom prst="roundRect">
+            <a:avLst>
+              <a:gd name="adj" fmla="val 6000"/>
+            </a:avLst>
           </a:prstGeom>
           <a:solidFill>
-            <a:srgbClr val="C44536"/>
+            <a:srgbClr val="21295C"/>
           </a:solidFill>
           <a:ln>
             <a:noFill/>
@@ -7524,30 +8718,19 @@
         <p:txBody>
           <a:bodyPr rtlCol="0" anchor="ctr"/>
           <a:lstStyle/>
-          <a:p>
-            <a:pPr algn="ctr"/>
-            <a:r>
-              <a:rPr sz="1700" b="1">
-                <a:solidFill>
-                  <a:srgbClr val="FFFFFF"/>
-                </a:solidFill>
-                <a:latin typeface="Calibri"/>
-              </a:rPr>
-              <a:t>3</a:t>
-            </a:r>
-          </a:p>
-        </p:txBody>
-      </p:sp>
-      <p:sp>
-        <p:nvSpPr>
-          <p:cNvPr id="16" name="TextBox 15"/>
+          <a:p/>
+        </p:txBody>
+      </p:sp>
+      <p:sp>
+        <p:nvSpPr>
+          <p:cNvPr id="14" name="TextBox 13"/>
           <p:cNvSpPr txBox="1"/>
           <p:nvPr/>
         </p:nvSpPr>
         <p:spPr>
           <a:xfrm>
-            <a:off x="1298448" y="5925312"/>
-            <a:ext cx="9966960" cy="411480"/>
+            <a:off x="1051560" y="5852160"/>
+            <a:ext cx="10058400" cy="457200"/>
           </a:xfrm>
           <a:prstGeom prst="rect">
             <a:avLst/>
@@ -7566,13 +8749,13 @@
               </a:lnSpc>
             </a:pPr>
             <a:r>
-              <a:rPr sz="1350" b="0" i="0">
-                <a:solidFill>
-                  <a:srgbClr val="1A1F36"/>
+              <a:rPr sz="1450" b="1" i="0">
+                <a:solidFill>
+                  <a:srgbClr val="FFFFFF"/>
                 </a:solidFill>
                 <a:latin typeface="Calibri"/>
               </a:rPr>
-              <a:t>Kill: ≈K0 (ignores), &lt;K0 (poisoned), or stuck at 0.22 (learned only consensus)</a:t>
+              <a:t>A +0.157 swing in how the two models respond to identical input. Candidate discrimination WAS learned.</a:t>
             </a:r>
           </a:p>
         </p:txBody>
@@ -7585,7 +8768,701 @@
 </p:sld>
 </file>
 
-<file path=ppt/slides/slide15.xml><?xml version="1.0" encoding="utf-8"?>
+<file path=ppt/slides/slide16.xml><?xml version="1.0" encoding="utf-8"?>
+<p:sld xmlns:a="http://schemas.openxmlformats.org/drawingml/2006/main" xmlns:p="http://schemas.openxmlformats.org/presentationml/2006/main" xmlns:r="http://schemas.openxmlformats.org/officeDocument/2006/relationships">
+  <p:cSld>
+    <p:bg>
+      <p:bgPr>
+        <a:solidFill>
+          <a:srgbClr val="FFFFFF"/>
+        </a:solidFill>
+        <a:effectLst/>
+      </p:bgPr>
+    </p:bg>
+    <p:spTree>
+      <p:nvGrpSpPr>
+        <p:cNvPr id="1" name=""/>
+        <p:cNvGrpSpPr/>
+        <p:nvPr/>
+      </p:nvGrpSpPr>
+      <p:grpSpPr/>
+      <p:sp>
+        <p:nvSpPr>
+          <p:cNvPr id="2" name="TextBox 1"/>
+          <p:cNvSpPr txBox="1"/>
+          <p:nvPr/>
+        </p:nvSpPr>
+        <p:spPr>
+          <a:xfrm>
+            <a:off x="640080" y="457200"/>
+            <a:ext cx="10911535" cy="777240"/>
+          </a:xfrm>
+          <a:prstGeom prst="rect">
+            <a:avLst/>
+          </a:prstGeom>
+          <a:noFill/>
+        </p:spPr>
+        <p:txBody>
+          <a:bodyPr wrap="square" lIns="0" rIns="0" tIns="0" bIns="0" anchor="t">
+            <a:spAutoFit/>
+          </a:bodyPr>
+          <a:lstStyle/>
+          <a:p>
+            <a:pPr algn="l">
+              <a:lnSpc>
+                <a:spcPct val="100000"/>
+              </a:lnSpc>
+            </a:pPr>
+            <a:r>
+              <a:rPr sz="3400" b="1" i="0">
+                <a:solidFill>
+                  <a:srgbClr val="21295C"/>
+                </a:solidFill>
+                <a:latin typeface="Cambria"/>
+              </a:rPr>
+              <a:t>Why it still loses: forgetting</a:t>
+            </a:r>
+          </a:p>
+        </p:txBody>
+      </p:sp>
+      <p:sp>
+        <p:nvSpPr>
+          <p:cNvPr id="3" name="TextBox 2"/>
+          <p:cNvSpPr txBox="1"/>
+          <p:nvPr/>
+        </p:nvSpPr>
+        <p:spPr>
+          <a:xfrm>
+            <a:off x="640080" y="1207008"/>
+            <a:ext cx="10911535" cy="457200"/>
+          </a:xfrm>
+          <a:prstGeom prst="rect">
+            <a:avLst/>
+          </a:prstGeom>
+          <a:noFill/>
+        </p:spPr>
+        <p:txBody>
+          <a:bodyPr wrap="square" lIns="0" rIns="0" tIns="0" bIns="0" anchor="t">
+            <a:spAutoFit/>
+          </a:bodyPr>
+          <a:lstStyle/>
+          <a:p>
+            <a:pPr algn="l">
+              <a:lnSpc>
+                <a:spcPct val="100000"/>
+              </a:lnSpc>
+            </a:pPr>
+            <a:r>
+              <a:rPr sz="1500" b="0" i="1">
+                <a:solidFill>
+                  <a:srgbClr val="6B748C"/>
+                </a:solidFill>
+                <a:latin typeface="Calibri"/>
+              </a:rPr>
+              <a:t>The refiner is not bad at refining. It is bad at contacts.</a:t>
+            </a:r>
+          </a:p>
+        </p:txBody>
+      </p:sp>
+      <p:sp>
+        <p:nvSpPr>
+          <p:cNvPr id="4" name="Rounded Rectangle 3"/>
+          <p:cNvSpPr/>
+          <p:nvPr/>
+        </p:nvSpPr>
+        <p:spPr>
+          <a:xfrm>
+            <a:off x="822960" y="1965960"/>
+            <a:ext cx="3291840" cy="1828800"/>
+          </a:xfrm>
+          <a:prstGeom prst="roundRect">
+            <a:avLst>
+              <a:gd name="adj" fmla="val 6000"/>
+            </a:avLst>
+          </a:prstGeom>
+          <a:solidFill>
+            <a:srgbClr val="F1F5F9"/>
+          </a:solidFill>
+          <a:ln>
+            <a:noFill/>
+          </a:ln>
+          <a:effectLst/>
+        </p:spPr>
+        <p:style>
+          <a:lnRef idx="1">
+            <a:schemeClr val="accent1"/>
+          </a:lnRef>
+          <a:fillRef idx="3">
+            <a:schemeClr val="accent1"/>
+          </a:fillRef>
+          <a:effectRef idx="2">
+            <a:schemeClr val="accent1"/>
+          </a:effectRef>
+          <a:fontRef idx="minor">
+            <a:schemeClr val="lt1"/>
+          </a:fontRef>
+        </p:style>
+        <p:txBody>
+          <a:bodyPr rtlCol="0" anchor="ctr"/>
+          <a:lstStyle/>
+          <a:p/>
+        </p:txBody>
+      </p:sp>
+      <p:sp>
+        <p:nvSpPr>
+          <p:cNvPr id="5" name="TextBox 4"/>
+          <p:cNvSpPr txBox="1"/>
+          <p:nvPr/>
+        </p:nvSpPr>
+        <p:spPr>
+          <a:xfrm>
+            <a:off x="822960" y="2194560"/>
+            <a:ext cx="3291840" cy="685800"/>
+          </a:xfrm>
+          <a:prstGeom prst="rect">
+            <a:avLst/>
+          </a:prstGeom>
+          <a:noFill/>
+        </p:spPr>
+        <p:txBody>
+          <a:bodyPr wrap="square" lIns="0" rIns="0" tIns="0" bIns="0" anchor="t">
+            <a:spAutoFit/>
+          </a:bodyPr>
+          <a:lstStyle/>
+          <a:p>
+            <a:pPr algn="ctr">
+              <a:lnSpc>
+                <a:spcPct val="100000"/>
+              </a:lnSpc>
+            </a:pPr>
+            <a:r>
+              <a:rPr sz="3200" b="1" i="0">
+                <a:solidFill>
+                  <a:srgbClr val="1C7293"/>
+                </a:solidFill>
+                <a:latin typeface="Cambria"/>
+              </a:rPr>
+              <a:t>0.3355</a:t>
+            </a:r>
+          </a:p>
+        </p:txBody>
+      </p:sp>
+      <p:sp>
+        <p:nvSpPr>
+          <p:cNvPr id="6" name="TextBox 5"/>
+          <p:cNvSpPr txBox="1"/>
+          <p:nvPr/>
+        </p:nvSpPr>
+        <p:spPr>
+          <a:xfrm>
+            <a:off x="822960" y="2907791"/>
+            <a:ext cx="3291840" cy="502920"/>
+          </a:xfrm>
+          <a:prstGeom prst="rect">
+            <a:avLst/>
+          </a:prstGeom>
+          <a:noFill/>
+        </p:spPr>
+        <p:txBody>
+          <a:bodyPr wrap="square" lIns="0" rIns="0" tIns="0" bIns="0" anchor="t">
+            <a:spAutoFit/>
+          </a:bodyPr>
+          <a:lstStyle/>
+          <a:p>
+            <a:pPr algn="ctr">
+              <a:lnSpc>
+                <a:spcPct val="100000"/>
+              </a:lnSpc>
+            </a:pPr>
+            <a:r>
+              <a:rPr sz="1300" b="1" i="0">
+                <a:solidFill>
+                  <a:srgbClr val="21295C"/>
+                </a:solidFill>
+                <a:latin typeface="Calibri"/>
+              </a:rPr>
+              <a:t>base K0</a:t>
+            </a:r>
+          </a:p>
+        </p:txBody>
+      </p:sp>
+      <p:sp>
+        <p:nvSpPr>
+          <p:cNvPr id="7" name="TextBox 6"/>
+          <p:cNvSpPr txBox="1"/>
+          <p:nvPr/>
+        </p:nvSpPr>
+        <p:spPr>
+          <a:xfrm>
+            <a:off x="822960" y="3310128"/>
+            <a:ext cx="3291840" cy="457200"/>
+          </a:xfrm>
+          <a:prstGeom prst="rect">
+            <a:avLst/>
+          </a:prstGeom>
+          <a:noFill/>
+        </p:spPr>
+        <p:txBody>
+          <a:bodyPr wrap="square" lIns="0" rIns="0" tIns="0" bIns="0" anchor="t">
+            <a:spAutoFit/>
+          </a:bodyPr>
+          <a:lstStyle/>
+          <a:p>
+            <a:pPr algn="ctr">
+              <a:lnSpc>
+                <a:spcPct val="100000"/>
+              </a:lnSpc>
+            </a:pPr>
+            <a:r>
+              <a:rPr sz="1100" b="0" i="0">
+                <a:solidFill>
+                  <a:srgbClr val="6B748C"/>
+                </a:solidFill>
+                <a:latin typeface="Calibri"/>
+              </a:rPr>
+              <a:t>one-shot contact ability</a:t>
+            </a:r>
+          </a:p>
+        </p:txBody>
+      </p:sp>
+      <p:sp>
+        <p:nvSpPr>
+          <p:cNvPr id="8" name="Rounded Rectangle 7"/>
+          <p:cNvSpPr/>
+          <p:nvPr/>
+        </p:nvSpPr>
+        <p:spPr>
+          <a:xfrm>
+            <a:off x="4480560" y="1965960"/>
+            <a:ext cx="3291840" cy="1828800"/>
+          </a:xfrm>
+          <a:prstGeom prst="roundRect">
+            <a:avLst>
+              <a:gd name="adj" fmla="val 6000"/>
+            </a:avLst>
+          </a:prstGeom>
+          <a:solidFill>
+            <a:srgbClr val="F1F5F9"/>
+          </a:solidFill>
+          <a:ln>
+            <a:noFill/>
+          </a:ln>
+          <a:effectLst/>
+        </p:spPr>
+        <p:style>
+          <a:lnRef idx="1">
+            <a:schemeClr val="accent1"/>
+          </a:lnRef>
+          <a:fillRef idx="3">
+            <a:schemeClr val="accent1"/>
+          </a:fillRef>
+          <a:effectRef idx="2">
+            <a:schemeClr val="accent1"/>
+          </a:effectRef>
+          <a:fontRef idx="minor">
+            <a:schemeClr val="lt1"/>
+          </a:fontRef>
+        </p:style>
+        <p:txBody>
+          <a:bodyPr rtlCol="0" anchor="ctr"/>
+          <a:lstStyle/>
+          <a:p/>
+        </p:txBody>
+      </p:sp>
+      <p:sp>
+        <p:nvSpPr>
+          <p:cNvPr id="9" name="TextBox 8"/>
+          <p:cNvSpPr txBox="1"/>
+          <p:nvPr/>
+        </p:nvSpPr>
+        <p:spPr>
+          <a:xfrm>
+            <a:off x="4480560" y="2194560"/>
+            <a:ext cx="3291840" cy="685800"/>
+          </a:xfrm>
+          <a:prstGeom prst="rect">
+            <a:avLst/>
+          </a:prstGeom>
+          <a:noFill/>
+        </p:spPr>
+        <p:txBody>
+          <a:bodyPr wrap="square" lIns="0" rIns="0" tIns="0" bIns="0" anchor="t">
+            <a:spAutoFit/>
+          </a:bodyPr>
+          <a:lstStyle/>
+          <a:p>
+            <a:pPr algn="ctr">
+              <a:lnSpc>
+                <a:spcPct val="100000"/>
+              </a:lnSpc>
+            </a:pPr>
+            <a:r>
+              <a:rPr sz="3200" b="1" i="0">
+                <a:solidFill>
+                  <a:srgbClr val="C44536"/>
+                </a:solidFill>
+                <a:latin typeface="Cambria"/>
+              </a:rPr>
+              <a:t>0.1978</a:t>
+            </a:r>
+          </a:p>
+        </p:txBody>
+      </p:sp>
+      <p:sp>
+        <p:nvSpPr>
+          <p:cNvPr id="10" name="TextBox 9"/>
+          <p:cNvSpPr txBox="1"/>
+          <p:nvPr/>
+        </p:nvSpPr>
+        <p:spPr>
+          <a:xfrm>
+            <a:off x="4480560" y="2907791"/>
+            <a:ext cx="3291840" cy="502920"/>
+          </a:xfrm>
+          <a:prstGeom prst="rect">
+            <a:avLst/>
+          </a:prstGeom>
+          <a:noFill/>
+        </p:spPr>
+        <p:txBody>
+          <a:bodyPr wrap="square" lIns="0" rIns="0" tIns="0" bIns="0" anchor="t">
+            <a:spAutoFit/>
+          </a:bodyPr>
+          <a:lstStyle/>
+          <a:p>
+            <a:pPr algn="ctr">
+              <a:lnSpc>
+                <a:spcPct val="100000"/>
+              </a:lnSpc>
+            </a:pPr>
+            <a:r>
+              <a:rPr sz="1300" b="1" i="0">
+                <a:solidFill>
+                  <a:srgbClr val="21295C"/>
+                </a:solidFill>
+                <a:latin typeface="Calibri"/>
+              </a:rPr>
+              <a:t>refiner K0</a:t>
+            </a:r>
+          </a:p>
+        </p:txBody>
+      </p:sp>
+      <p:sp>
+        <p:nvSpPr>
+          <p:cNvPr id="11" name="TextBox 10"/>
+          <p:cNvSpPr txBox="1"/>
+          <p:nvPr/>
+        </p:nvSpPr>
+        <p:spPr>
+          <a:xfrm>
+            <a:off x="4480560" y="3310128"/>
+            <a:ext cx="3291840" cy="457200"/>
+          </a:xfrm>
+          <a:prstGeom prst="rect">
+            <a:avLst/>
+          </a:prstGeom>
+          <a:noFill/>
+        </p:spPr>
+        <p:txBody>
+          <a:bodyPr wrap="square" lIns="0" rIns="0" tIns="0" bIns="0" anchor="t">
+            <a:spAutoFit/>
+          </a:bodyPr>
+          <a:lstStyle/>
+          <a:p>
+            <a:pPr algn="ctr">
+              <a:lnSpc>
+                <a:spcPct val="100000"/>
+              </a:lnSpc>
+            </a:pPr>
+            <a:r>
+              <a:rPr sz="1100" b="0" i="0">
+                <a:solidFill>
+                  <a:srgbClr val="6B748C"/>
+                </a:solidFill>
+                <a:latin typeface="Calibri"/>
+              </a:rPr>
+              <a:t>after 1 epoch of fine-tuning</a:t>
+            </a:r>
+          </a:p>
+        </p:txBody>
+      </p:sp>
+      <p:sp>
+        <p:nvSpPr>
+          <p:cNvPr id="12" name="Rounded Rectangle 11"/>
+          <p:cNvSpPr/>
+          <p:nvPr/>
+        </p:nvSpPr>
+        <p:spPr>
+          <a:xfrm>
+            <a:off x="8138160" y="1965960"/>
+            <a:ext cx="3291840" cy="1828800"/>
+          </a:xfrm>
+          <a:prstGeom prst="roundRect">
+            <a:avLst>
+              <a:gd name="adj" fmla="val 6000"/>
+            </a:avLst>
+          </a:prstGeom>
+          <a:solidFill>
+            <a:srgbClr val="F1F5F9"/>
+          </a:solidFill>
+          <a:ln>
+            <a:noFill/>
+          </a:ln>
+          <a:effectLst/>
+        </p:spPr>
+        <p:style>
+          <a:lnRef idx="1">
+            <a:schemeClr val="accent1"/>
+          </a:lnRef>
+          <a:fillRef idx="3">
+            <a:schemeClr val="accent1"/>
+          </a:fillRef>
+          <a:effectRef idx="2">
+            <a:schemeClr val="accent1"/>
+          </a:effectRef>
+          <a:fontRef idx="minor">
+            <a:schemeClr val="lt1"/>
+          </a:fontRef>
+        </p:style>
+        <p:txBody>
+          <a:bodyPr rtlCol="0" anchor="ctr"/>
+          <a:lstStyle/>
+          <a:p/>
+        </p:txBody>
+      </p:sp>
+      <p:sp>
+        <p:nvSpPr>
+          <p:cNvPr id="13" name="TextBox 12"/>
+          <p:cNvSpPr txBox="1"/>
+          <p:nvPr/>
+        </p:nvSpPr>
+        <p:spPr>
+          <a:xfrm>
+            <a:off x="8138160" y="2194560"/>
+            <a:ext cx="3291840" cy="685800"/>
+          </a:xfrm>
+          <a:prstGeom prst="rect">
+            <a:avLst/>
+          </a:prstGeom>
+          <a:noFill/>
+        </p:spPr>
+        <p:txBody>
+          <a:bodyPr wrap="square" lIns="0" rIns="0" tIns="0" bIns="0" anchor="t">
+            <a:spAutoFit/>
+          </a:bodyPr>
+          <a:lstStyle/>
+          <a:p>
+            <a:pPr algn="ctr">
+              <a:lnSpc>
+                <a:spcPct val="100000"/>
+              </a:lnSpc>
+            </a:pPr>
+            <a:r>
+              <a:rPr sz="3200" b="1" i="0">
+                <a:solidFill>
+                  <a:srgbClr val="C44536"/>
+                </a:solidFill>
+                <a:latin typeface="Cambria"/>
+              </a:rPr>
+              <a:t>-41%</a:t>
+            </a:r>
+          </a:p>
+        </p:txBody>
+      </p:sp>
+      <p:sp>
+        <p:nvSpPr>
+          <p:cNvPr id="14" name="TextBox 13"/>
+          <p:cNvSpPr txBox="1"/>
+          <p:nvPr/>
+        </p:nvSpPr>
+        <p:spPr>
+          <a:xfrm>
+            <a:off x="8138160" y="2907791"/>
+            <a:ext cx="3291840" cy="502920"/>
+          </a:xfrm>
+          <a:prstGeom prst="rect">
+            <a:avLst/>
+          </a:prstGeom>
+          <a:noFill/>
+        </p:spPr>
+        <p:txBody>
+          <a:bodyPr wrap="square" lIns="0" rIns="0" tIns="0" bIns="0" anchor="t">
+            <a:spAutoFit/>
+          </a:bodyPr>
+          <a:lstStyle/>
+          <a:p>
+            <a:pPr algn="ctr">
+              <a:lnSpc>
+                <a:spcPct val="100000"/>
+              </a:lnSpc>
+            </a:pPr>
+            <a:r>
+              <a:rPr sz="1300" b="1" i="0">
+                <a:solidFill>
+                  <a:srgbClr val="21295C"/>
+                </a:solidFill>
+                <a:latin typeface="Calibri"/>
+              </a:rPr>
+              <a:t>of the base task</a:t>
+            </a:r>
+          </a:p>
+        </p:txBody>
+      </p:sp>
+      <p:sp>
+        <p:nvSpPr>
+          <p:cNvPr id="15" name="TextBox 14"/>
+          <p:cNvSpPr txBox="1"/>
+          <p:nvPr/>
+        </p:nvSpPr>
+        <p:spPr>
+          <a:xfrm>
+            <a:off x="8138160" y="3310128"/>
+            <a:ext cx="3291840" cy="457200"/>
+          </a:xfrm>
+          <a:prstGeom prst="rect">
+            <a:avLst/>
+          </a:prstGeom>
+          <a:noFill/>
+        </p:spPr>
+        <p:txBody>
+          <a:bodyPr wrap="square" lIns="0" rIns="0" tIns="0" bIns="0" anchor="t">
+            <a:spAutoFit/>
+          </a:bodyPr>
+          <a:lstStyle/>
+          <a:p>
+            <a:pPr algn="ctr">
+              <a:lnSpc>
+                <a:spcPct val="100000"/>
+              </a:lnSpc>
+            </a:pPr>
+            <a:r>
+              <a:rPr sz="1100" b="0" i="0">
+                <a:solidFill>
+                  <a:srgbClr val="6B748C"/>
+                </a:solidFill>
+                <a:latin typeface="Calibri"/>
+              </a:rPr>
+              <a:t>base wins on 94% of proteins</a:t>
+            </a:r>
+          </a:p>
+        </p:txBody>
+      </p:sp>
+      <p:sp>
+        <p:nvSpPr>
+          <p:cNvPr id="16" name="TextBox 15"/>
+          <p:cNvSpPr txBox="1"/>
+          <p:nvPr/>
+        </p:nvSpPr>
+        <p:spPr>
+          <a:xfrm>
+            <a:off x="822960" y="4114800"/>
+            <a:ext cx="10515600" cy="2194560"/>
+          </a:xfrm>
+          <a:prstGeom prst="rect">
+            <a:avLst/>
+          </a:prstGeom>
+          <a:noFill/>
+        </p:spPr>
+        <p:txBody>
+          <a:bodyPr wrap="square" lIns="0" rIns="0" tIns="0" bIns="0">
+            <a:spAutoFit/>
+          </a:bodyPr>
+          <a:lstStyle/>
+          <a:p>
+            <a:pPr>
+              <a:lnSpc>
+                <a:spcPct val="115000"/>
+              </a:lnSpc>
+              <a:spcAft>
+                <a:spcPts val="1300"/>
+              </a:spcAft>
+            </a:pPr>
+            <a:r>
+              <a:rPr sz="1400" b="1">
+                <a:solidFill>
+                  <a:srgbClr val="21295C"/>
+                </a:solidFill>
+                <a:latin typeface="Calibri"/>
+              </a:rPr>
+              <a:t>A +0.024 conditioning gain cannot climb out of a 0.138 hole. </a:t>
+            </a:r>
+            <a:r>
+              <a:rPr sz="1400">
+                <a:solidFill>
+                  <a:srgbClr val="1A1F36"/>
+                </a:solidFill>
+                <a:latin typeface="Calibri"/>
+              </a:rPr>
+              <a:t>Nothing clears the bar because the refiner starts from a much weaker model.</a:t>
+            </a:r>
+          </a:p>
+          <a:p>
+            <a:pPr>
+              <a:lnSpc>
+                <a:spcPct val="115000"/>
+              </a:lnSpc>
+              <a:spcAft>
+                <a:spcPts val="1300"/>
+              </a:spcAft>
+            </a:pPr>
+            <a:r>
+              <a:rPr sz="1400" b="1">
+                <a:solidFill>
+                  <a:srgbClr val="21295C"/>
+                </a:solidFill>
+                <a:latin typeface="Calibri"/>
+              </a:rPr>
+              <a:t>The LM proxy badly under-reports the damage. </a:t>
+            </a:r>
+            <a:r>
+              <a:rPr sz="1400">
+                <a:solidFill>
+                  <a:srgbClr val="1A1F36"/>
+                </a:solidFill>
+                <a:latin typeface="Calibri"/>
+              </a:rPr>
+              <a:t>Base-task val bpb moved 0.9% (0.39151 -&gt; 0.39489). The contact metric moved 41%. Exactly what #89's loss-vs-R-precision study warned about.</a:t>
+            </a:r>
+          </a:p>
+          <a:p>
+            <a:pPr>
+              <a:lnSpc>
+                <a:spcPct val="115000"/>
+              </a:lnSpc>
+              <a:spcAft>
+                <a:spcPts val="1300"/>
+              </a:spcAft>
+            </a:pPr>
+            <a:r>
+              <a:rPr sz="1400" b="1">
+                <a:solidFill>
+                  <a:srgbClr val="21295C"/>
+                </a:solidFill>
+                <a:latin typeface="Calibri"/>
+              </a:rPr>
+              <a:t>Scaling 100x does not fix this. </a:t>
+            </a:r>
+            <a:r>
+              <a:rPr sz="1400">
+                <a:solidFill>
+                  <a:srgbClr val="1A1F36"/>
+                </a:solidFill>
+                <a:latin typeface="Calibri"/>
+              </a:rPr>
+              <a:t>Fix the forgetting first: LoRA (as the MVP used), lower LR, or mix plain contacts-v1 documents in so K=0 stays anchored.</a:t>
+            </a:r>
+          </a:p>
+        </p:txBody>
+      </p:sp>
+    </p:spTree>
+  </p:cSld>
+  <p:clrMapOvr>
+    <a:masterClrMapping/>
+  </p:clrMapOvr>
+</p:sld>
+</file>
+
+<file path=ppt/slides/slide17.xml><?xml version="1.0" encoding="utf-8"?>
 <p:sld xmlns:a="http://schemas.openxmlformats.org/drawingml/2006/main" xmlns:p="http://schemas.openxmlformats.org/presentationml/2006/main" xmlns:r="http://schemas.openxmlformats.org/officeDocument/2006/relationships">
   <p:cSld>
     <p:bg>
@@ -7637,7 +9514,7 @@
                 </a:solidFill>
                 <a:latin typeface="Cambria"/>
               </a:rPr>
-              <a:t>The 1M push — a decision, not a default</a:t>
+              <a:t>The 1M push — now a harder call</a:t>
             </a:r>
           </a:p>
         </p:txBody>
@@ -7676,7 +9553,7 @@
                 </a:solidFill>
                 <a:latin typeface="Calibri"/>
               </a:rPr>
-              <a:t>Cost measured on the 10k batch, not estimated.</a:t>
+              <a:t>Cost measured on the 10k batch, not estimated. But scale is not the blocker.</a:t>
             </a:r>
           </a:p>
         </p:txBody>
@@ -8140,7 +10017,7 @@
                 </a:solidFill>
                 <a:latin typeface="Calibri"/>
               </a:rPr>
-              <a:t>One wrinkle first. </a:t>
+              <a:t>Phase 3 changes the question. </a:t>
             </a:r>
             <a:r>
               <a:rPr sz="1400">
@@ -8149,7 +10026,7 @@
                 </a:solidFill>
                 <a:latin typeface="Calibri"/>
               </a:rPr>
-              <a:t>Prompt generation still writes one S3 object per target — fine for 554, ~1M objects at scale. Fixing it needs matched changes in the worker's reader.</a:t>
+              <a:t>The kill criterion is met and the binding constraint is forgetting, not data volume — so spending ~1,700 H100-hours on the same recipe would buy a better-trained version of a model that loses to its own base.</a:t>
             </a:r>
           </a:p>
         </p:txBody>

--- a/experiments/exp163_models_teach_contacts_v1_to_refine_a/exp163_deck.pptx
+++ b/experiments/exp163_models_teach_contacts_v1_to_refine_a/exp163_deck.pptx
@@ -22,6 +22,9 @@
     <p:sldId id="270" r:id="rId21"/>
     <p:sldId id="271" r:id="rId22"/>
     <p:sldId id="272" r:id="rId23"/>
+    <p:sldId id="273" r:id="rId24"/>
+    <p:sldId id="274" r:id="rId25"/>
+    <p:sldId id="275" r:id="rId26"/>
   </p:sldIdLst>
   <p:sldSz cx="12191695" cy="6858000" type="screen4x3"/>
   <p:notesSz cx="6858000" cy="9144000"/>
@@ -1102,6 +1105,204 @@
         </a:p>
       </c:txPr>
     </c:legend>
+    <c:dispBlanksAs val="gap"/>
+  </c:chart>
+  <c:txPr>
+    <a:bodyPr/>
+    <a:lstStyle/>
+    <a:p>
+      <a:pPr>
+        <a:defRPr sz="1800"/>
+      </a:pPr>
+      <a:endParaRPr lang="en-US"/>
+    </a:p>
+  </c:txPr>
+  <c:externalData r:id="rId1">
+    <c:autoUpdate val="0"/>
+  </c:externalData>
+</c:chartSpace>
+</file>
+
+<file path=ppt/charts/chart5.xml><?xml version="1.0" encoding="utf-8"?>
+<c:chartSpace xmlns:c="http://schemas.openxmlformats.org/drawingml/2006/chart" xmlns:a="http://schemas.openxmlformats.org/drawingml/2006/main" xmlns:r="http://schemas.openxmlformats.org/officeDocument/2006/relationships">
+  <c:date1904 val="0"/>
+  <c:chart>
+    <c:autoTitleDeleted val="1"/>
+    <c:plotArea>
+      <c:barChart>
+        <c:barDir val="col"/>
+        <c:grouping val="clustered"/>
+        <c:ser>
+          <c:idx val="0"/>
+          <c:order val="0"/>
+          <c:tx>
+            <c:strRef>
+              <c:f>Sheet1!$B$1</c:f>
+              <c:strCache>
+                <c:ptCount val="1"/>
+                <c:pt idx="0">
+                  <c:v>K0 loss vs base</c:v>
+                </c:pt>
+              </c:strCache>
+            </c:strRef>
+          </c:tx>
+          <c:dPt>
+            <c:idx val="0"/>
+            <c:spPr>
+              <a:solidFill>
+                <a:srgbClr val="2E7D5B"/>
+              </a:solidFill>
+            </c:spPr>
+          </c:dPt>
+          <c:dPt>
+            <c:idx val="1"/>
+            <c:spPr>
+              <a:solidFill>
+                <a:srgbClr val="C44536"/>
+              </a:solidFill>
+            </c:spPr>
+          </c:dPt>
+          <c:dPt>
+            <c:idx val="2"/>
+            <c:spPr>
+              <a:solidFill>
+                <a:srgbClr val="C44536"/>
+              </a:solidFill>
+            </c:spPr>
+          </c:dPt>
+          <c:cat>
+            <c:strRef>
+              <c:f>Sheet1!$A$2:$A$4</c:f>
+              <c:strCache>
+                <c:ptCount val="3"/>
+                <c:pt idx="0">
+                  <c:v>LoRA
+900 proteins</c:v>
+                </c:pt>
+                <c:pt idx="1">
+                  <c:v>full FT
+18,750 docs</c:v>
+                </c:pt>
+                <c:pt idx="2">
+                  <c:v>full FT
+100,000 docs</c:v>
+                </c:pt>
+              </c:strCache>
+            </c:strRef>
+          </c:cat>
+          <c:val>
+            <c:numRef>
+              <c:f>Sheet1!$B$2:$B$4</c:f>
+              <c:numCache>
+                <c:formatCode>General</c:formatCode>
+                <c:ptCount val="3"/>
+                <c:pt idx="0">
+                  <c:v>-7</c:v>
+                </c:pt>
+                <c:pt idx="1">
+                  <c:v>-41</c:v>
+                </c:pt>
+                <c:pt idx="2">
+                  <c:v>-44</c:v>
+                </c:pt>
+              </c:numCache>
+            </c:numRef>
+          </c:val>
+        </c:ser>
+        <c:dLbls>
+          <c:numFmt formatCode="0&quot;%&quot;" sourceLinked="0"/>
+          <c:txPr>
+            <a:bodyPr/>
+            <a:lstStyle/>
+            <a:p>
+              <a:pPr>
+                <a:defRPr sz="1300" b="1">
+                  <a:solidFill>
+                    <a:srgbClr val="FFFFFF"/>
+                  </a:solidFill>
+                  <a:latin typeface="Calibri"/>
+                </a:defRPr>
+              </a:pPr>
+            </a:p>
+          </c:txPr>
+          <c:dLblPos val="inEnd"/>
+          <c:showLegendKey val="0"/>
+          <c:showVal val="1"/>
+          <c:showCatName val="0"/>
+          <c:showSerName val="0"/>
+          <c:showPercent val="0"/>
+          <c:showBubbleSize val="0"/>
+          <c:showLeaderLines val="1"/>
+        </c:dLbls>
+        <c:axId val="-2068027336"/>
+        <c:axId val="-2113994440"/>
+      </c:barChart>
+      <c:catAx>
+        <c:axId val="-2068027336"/>
+        <c:scaling>
+          <c:orientation val="minMax"/>
+        </c:scaling>
+        <c:delete val="0"/>
+        <c:axPos val="b"/>
+        <c:majorTickMark val="out"/>
+        <c:minorTickMark val="none"/>
+        <c:tickLblPos val="low"/>
+        <c:txPr>
+          <a:bodyPr/>
+          <a:lstStyle/>
+          <a:p>
+            <a:pPr>
+              <a:defRPr sz="1100">
+                <a:solidFill>
+                  <a:srgbClr val="C9D4E8"/>
+                </a:solidFill>
+                <a:latin typeface="Calibri"/>
+              </a:defRPr>
+            </a:pPr>
+          </a:p>
+        </c:txPr>
+        <c:crossAx val="-2113994440"/>
+        <c:crosses val="autoZero"/>
+        <c:auto val="1"/>
+        <c:lblAlgn val="ctr"/>
+        <c:lblOffset val="100"/>
+        <c:noMultiLvlLbl val="0"/>
+      </c:catAx>
+      <c:valAx>
+        <c:axId val="-2113994440"/>
+        <c:scaling/>
+        <c:delete val="0"/>
+        <c:axPos val="l"/>
+        <c:majorGridlines>
+          <c:spPr>
+            <a:ln w="9525">
+              <a:solidFill>
+                <a:srgbClr val="DDE3EC"/>
+              </a:solidFill>
+            </a:ln>
+          </c:spPr>
+        </c:majorGridlines>
+        <c:majorTickMark val="out"/>
+        <c:minorTickMark val="none"/>
+        <c:tickLblPos val="nextTo"/>
+        <c:txPr>
+          <a:bodyPr/>
+          <a:lstStyle/>
+          <a:p>
+            <a:pPr>
+              <a:defRPr sz="1100">
+                <a:solidFill>
+                  <a:srgbClr val="C9D4E8"/>
+                </a:solidFill>
+                <a:latin typeface="Calibri"/>
+              </a:defRPr>
+            </a:pPr>
+          </a:p>
+        </c:txPr>
+        <c:crossAx val="-2068027336"/>
+        <c:crosses val="autoZero"/>
+      </c:valAx>
+    </c:plotArea>
     <c:dispBlanksAs val="gap"/>
   </c:chart>
   <c:txPr>
@@ -9468,7 +9669,7 @@
     <p:bg>
       <p:bgPr>
         <a:solidFill>
-          <a:srgbClr val="21295C"/>
+          <a:srgbClr val="FFFFFF"/>
         </a:solidFill>
         <a:effectLst/>
       </p:bgPr>
@@ -9510,11 +9711,11 @@
             <a:r>
               <a:rPr sz="3400" b="1" i="0">
                 <a:solidFill>
-                  <a:srgbClr val="FFFFFF"/>
+                  <a:srgbClr val="21295C"/>
                 </a:solidFill>
                 <a:latin typeface="Cambria"/>
               </a:rPr>
-              <a:t>The 1M push — now a harder call</a:t>
+              <a:t>v2 — one marker, for RL</a:t>
             </a:r>
           </a:p>
         </p:txBody>
@@ -9549,11 +9750,11 @@
             <a:r>
               <a:rPr sz="1500" b="0" i="1">
                 <a:solidFill>
-                  <a:srgbClr val="C9D4E8"/>
+                  <a:srgbClr val="6B748C"/>
                 </a:solidFill>
                 <a:latin typeface="Calibri"/>
               </a:rPr>
-              <a:t>Cost measured on the 10k batch, not estimated. But scale is not the blocker.</a:t>
+              <a:t>&lt;begin_statements&gt; means “discard the previous structure; here is a new candidate”.</a:t>
             </a:r>
           </a:p>
         </p:txBody>
@@ -9566,8 +9767,8 @@
         </p:nvSpPr>
         <p:spPr>
           <a:xfrm>
-            <a:off x="822960" y="2011680"/>
-            <a:ext cx="3246120" cy="1691640"/>
+            <a:off x="822960" y="1874519"/>
+            <a:ext cx="6766560" cy="2286000"/>
           </a:xfrm>
           <a:prstGeom prst="roundRect">
             <a:avLst>
@@ -9575,7 +9776,7 @@
             </a:avLst>
           </a:prstGeom>
           <a:solidFill>
-            <a:srgbClr val="2E3874"/>
+            <a:srgbClr val="141A33"/>
           </a:solidFill>
           <a:ln>
             <a:noFill/>
@@ -9610,8 +9811,95 @@
         </p:nvSpPr>
         <p:spPr>
           <a:xfrm>
-            <a:off x="822960" y="2240280"/>
-            <a:ext cx="3246120" cy="731520"/>
+            <a:off x="1024128" y="2020824"/>
+            <a:ext cx="6364224" cy="1993392"/>
+          </a:xfrm>
+          <a:prstGeom prst="rect">
+            <a:avLst/>
+          </a:prstGeom>
+          <a:noFill/>
+        </p:spPr>
+        <p:txBody>
+          <a:bodyPr wrap="none" lIns="0" rIns="0" tIns="0" bIns="0">
+            <a:spAutoFit/>
+          </a:bodyPr>
+          <a:lstStyle/>
+          <a:p>
+            <a:pPr algn="l">
+              <a:lnSpc>
+                <a:spcPct val="106000"/>
+              </a:lnSpc>
+            </a:pPr>
+            <a:r>
+              <a:rPr sz="1200" b="0">
+                <a:solidFill>
+                  <a:srgbClr val="9AB4D8"/>
+                </a:solidFill>
+                <a:latin typeface="Courier New"/>
+              </a:rPr>
+              <a:t>&lt;contacts-v1&gt; &lt;begin_sequence&gt; …seq…</a:t>
+            </a:r>
+          </a:p>
+          <a:p>
+            <a:pPr algn="l">
+              <a:lnSpc>
+                <a:spcPct val="106000"/>
+              </a:lnSpc>
+            </a:pPr>
+            <a:r>
+              <a:rPr sz="1200" b="0">
+                <a:solidFill>
+                  <a:srgbClr val="E88B2F"/>
+                </a:solidFill>
+                <a:latin typeface="Courier New"/>
+              </a:rPr>
+              <a:t>&lt;begin_statements&gt; …draft 1…            (no &lt;end&gt;)</a:t>
+            </a:r>
+          </a:p>
+          <a:p>
+            <a:pPr algn="l">
+              <a:lnSpc>
+                <a:spcPct val="106000"/>
+              </a:lnSpc>
+            </a:pPr>
+            <a:r>
+              <a:rPr sz="1200" b="0">
+                <a:solidFill>
+                  <a:srgbClr val="E88B2F"/>
+                </a:solidFill>
+                <a:latin typeface="Courier New"/>
+              </a:rPr>
+              <a:t>&lt;begin_statements&gt; …draft 2…</a:t>
+            </a:r>
+          </a:p>
+          <a:p>
+            <a:pPr algn="l">
+              <a:lnSpc>
+                <a:spcPct val="106000"/>
+              </a:lnSpc>
+            </a:pPr>
+            <a:r>
+              <a:rPr sz="1200" b="1">
+                <a:solidFill>
+                  <a:srgbClr val="7AD6A8"/>
+                </a:solidFill>
+                <a:latin typeface="Courier New"/>
+              </a:rPr>
+              <a:t>&lt;begin_statements&gt; …TRUE contacts… &lt;end&gt;</a:t>
+            </a:r>
+          </a:p>
+        </p:txBody>
+      </p:sp>
+      <p:sp>
+        <p:nvSpPr>
+          <p:cNvPr id="6" name="TextBox 5"/>
+          <p:cNvSpPr txBox="1"/>
+          <p:nvPr/>
+        </p:nvSpPr>
+        <p:spPr>
+          <a:xfrm>
+            <a:off x="822960" y="4297680"/>
+            <a:ext cx="6766560" cy="502920"/>
           </a:xfrm>
           <a:prstGeom prst="rect">
             <a:avLst/>
@@ -9624,33 +9912,140 @@
           </a:bodyPr>
           <a:lstStyle/>
           <a:p>
-            <a:pPr algn="ctr">
-              <a:lnSpc>
-                <a:spcPct val="100000"/>
-              </a:lnSpc>
-            </a:pPr>
-            <a:r>
-              <a:rPr sz="3400" b="1" i="0">
-                <a:solidFill>
-                  <a:srgbClr val="E88B2F"/>
-                </a:solidFill>
-                <a:latin typeface="Cambria"/>
-              </a:rPr>
-              <a:t>14,350</a:t>
-            </a:r>
-          </a:p>
-        </p:txBody>
-      </p:sp>
-      <p:sp>
-        <p:nvSpPr>
-          <p:cNvPr id="6" name="TextBox 5"/>
+            <a:pPr algn="l">
+              <a:lnSpc>
+                <a:spcPct val="120000"/>
+              </a:lnSpc>
+            </a:pPr>
+            <a:r>
+              <a:rPr sz="1300" b="0" i="1">
+                <a:solidFill>
+                  <a:srgbClr val="6B748C"/>
+                </a:solidFill>
+                <a:latin typeface="Calibri"/>
+              </a:rPr>
+              <a:t>Drafts and the answer are the SAME object — so one generation can emit N structures and be RL'd on best-of-N.</a:t>
+            </a:r>
+          </a:p>
+        </p:txBody>
+      </p:sp>
+      <p:sp>
+        <p:nvSpPr>
+          <p:cNvPr id="7" name="TextBox 6"/>
           <p:cNvSpPr txBox="1"/>
           <p:nvPr/>
         </p:nvSpPr>
         <p:spPr>
           <a:xfrm>
-            <a:off x="822960" y="3017520"/>
-            <a:ext cx="3246120" cy="457200"/>
+            <a:off x="7863840" y="1920240"/>
+            <a:ext cx="3520440" cy="4023360"/>
+          </a:xfrm>
+          <a:prstGeom prst="rect">
+            <a:avLst/>
+          </a:prstGeom>
+          <a:noFill/>
+        </p:spPr>
+        <p:txBody>
+          <a:bodyPr wrap="square" lIns="0" rIns="0" tIns="0" bIns="0">
+            <a:spAutoFit/>
+          </a:bodyPr>
+          <a:lstStyle/>
+          <a:p>
+            <a:pPr>
+              <a:lnSpc>
+                <a:spcPct val="115000"/>
+              </a:lnSpc>
+              <a:spcAft>
+                <a:spcPts val="1100"/>
+              </a:spcAft>
+            </a:pPr>
+            <a:r>
+              <a:rPr sz="1250" b="1">
+                <a:solidFill>
+                  <a:srgbClr val="21295C"/>
+                </a:solidFill>
+                <a:latin typeface="Calibri"/>
+              </a:rPr>
+              <a:t>Only the final section closes. </a:t>
+            </a:r>
+            <a:r>
+              <a:rPr sz="1250">
+                <a:solidFill>
+                  <a:srgbClr val="1A1F36"/>
+                </a:solidFill>
+                <a:latin typeface="Calibri"/>
+              </a:rPr>
+              <a:t>Drafts are superseded by the next &lt;begin_statements&gt;, so &lt;end&gt; keeps its meaning as the document terminator — it stays the stop token and no inference path changes.</a:t>
+            </a:r>
+          </a:p>
+          <a:p>
+            <a:pPr>
+              <a:lnSpc>
+                <a:spcPct val="115000"/>
+              </a:lnSpc>
+              <a:spcAft>
+                <a:spcPts val="1100"/>
+              </a:spcAft>
+            </a:pPr>
+            <a:r>
+              <a:rPr sz="1250" b="1">
+                <a:solidFill>
+                  <a:srgbClr val="21295C"/>
+                </a:solidFill>
+                <a:latin typeface="Calibri"/>
+              </a:rPr>
+              <a:t>Random draft order. </a:t>
+            </a:r>
+            <a:r>
+              <a:rPr sz="1250">
+                <a:solidFill>
+                  <a:srgbClr val="1A1F36"/>
+                </a:solidFill>
+                <a:latin typeface="Calibri"/>
+              </a:rPr>
+              <a:t>An ascending-F1 ramp lets position alone encode quality, so “later = better” is learnable without reading the drafts.</a:t>
+            </a:r>
+          </a:p>
+          <a:p>
+            <a:pPr>
+              <a:lnSpc>
+                <a:spcPct val="115000"/>
+              </a:lnSpc>
+              <a:spcAft>
+                <a:spcPts val="1100"/>
+              </a:spcAft>
+            </a:pPr>
+            <a:r>
+              <a:rPr sz="1250" b="1">
+                <a:solidFill>
+                  <a:srgbClr val="21295C"/>
+                </a:solidFill>
+                <a:latin typeface="Calibri"/>
+              </a:rPr>
+              <a:t>Three-way weight profile. </a:t>
+            </a:r>
+            <a:r>
+              <a:rPr sz="1250">
+                <a:solidFill>
+                  <a:srgbClr val="1A1F36"/>
+                </a:solidFill>
+                <a:latin typeface="Calibri"/>
+              </a:rPr>
+              <a:t>header / draft / final — swept, because loss on ~13%-precision drafts trains the model to emit WRONG contacts.</a:t>
+            </a:r>
+          </a:p>
+        </p:txBody>
+      </p:sp>
+      <p:sp>
+        <p:nvSpPr>
+          <p:cNvPr id="8" name="TextBox 7"/>
+          <p:cNvSpPr txBox="1"/>
+          <p:nvPr/>
+        </p:nvSpPr>
+        <p:spPr>
+          <a:xfrm>
+            <a:off x="640080" y="6291072"/>
+            <a:ext cx="10911535" cy="320040"/>
           </a:xfrm>
           <a:prstGeom prst="rect">
             <a:avLst/>
@@ -9663,41 +10058,1013 @@
           </a:bodyPr>
           <a:lstStyle/>
           <a:p>
-            <a:pPr algn="ctr">
+            <a:pPr algn="l">
               <a:lnSpc>
                 <a:spcPct val="100000"/>
               </a:lnSpc>
             </a:pPr>
             <a:r>
-              <a:rPr sz="1250" b="0" i="0">
-                <a:solidFill>
-                  <a:srgbClr val="C9D4E8"/>
+              <a:rPr sz="1050" b="0" i="1">
+                <a:solidFill>
+                  <a:srgbClr val="6B748C"/>
                 </a:solidFill>
                 <a:latin typeface="Calibri"/>
               </a:rPr>
-              <a:t>rollouts per GPU-hour</a:t>
-            </a:r>
-          </a:p>
-        </p:txBody>
-      </p:sp>
-      <p:sp>
-        <p:nvSpPr>
-          <p:cNvPr id="7" name="Rounded Rectangle 6"/>
+              <a:t>100,000 documents over 50,000 proteins · 35,133 packed sequences · 275 steps/epoch · 5.3× the previous signal.</a:t>
+            </a:r>
+          </a:p>
+        </p:txBody>
+      </p:sp>
+    </p:spTree>
+  </p:cSld>
+  <p:clrMapOvr>
+    <a:masterClrMapping/>
+  </p:clrMapOvr>
+</p:sld>
+</file>
+
+<file path=ppt/slides/slide18.xml><?xml version="1.0" encoding="utf-8"?>
+<p:sld xmlns:a="http://schemas.openxmlformats.org/drawingml/2006/main" xmlns:p="http://schemas.openxmlformats.org/presentationml/2006/main" xmlns:r="http://schemas.openxmlformats.org/officeDocument/2006/relationships">
+  <p:cSld>
+    <p:bg>
+      <p:bgPr>
+        <a:solidFill>
+          <a:srgbClr val="FFFFFF"/>
+        </a:solidFill>
+        <a:effectLst/>
+      </p:bgPr>
+    </p:bg>
+    <p:spTree>
+      <p:nvGrpSpPr>
+        <p:cNvPr id="1" name=""/>
+        <p:cNvGrpSpPr/>
+        <p:nvPr/>
+      </p:nvGrpSpPr>
+      <p:grpSpPr/>
+      <p:sp>
+        <p:nvSpPr>
+          <p:cNvPr id="2" name="TextBox 1"/>
+          <p:cNvSpPr txBox="1"/>
+          <p:nvPr/>
+        </p:nvSpPr>
+        <p:spPr>
+          <a:xfrm>
+            <a:off x="640080" y="457200"/>
+            <a:ext cx="10911535" cy="777240"/>
+          </a:xfrm>
+          <a:prstGeom prst="rect">
+            <a:avLst/>
+          </a:prstGeom>
+          <a:noFill/>
+        </p:spPr>
+        <p:txBody>
+          <a:bodyPr wrap="square" lIns="0" rIns="0" tIns="0" bIns="0" anchor="t">
+            <a:spAutoFit/>
+          </a:bodyPr>
+          <a:lstStyle/>
+          <a:p>
+            <a:pPr algn="l">
+              <a:lnSpc>
+                <a:spcPct val="100000"/>
+              </a:lnSpc>
+            </a:pPr>
+            <a:r>
+              <a:rPr sz="3400" b="1" i="0">
+                <a:solidFill>
+                  <a:srgbClr val="21295C"/>
+                </a:solidFill>
+                <a:latin typeface="Cambria"/>
+              </a:rPr>
+              <a:t>v2 results — three falsifications</a:t>
+            </a:r>
+          </a:p>
+        </p:txBody>
+      </p:sp>
+      <p:sp>
+        <p:nvSpPr>
+          <p:cNvPr id="3" name="TextBox 2"/>
+          <p:cNvSpPr txBox="1"/>
+          <p:nvPr/>
+        </p:nvSpPr>
+        <p:spPr>
+          <a:xfrm>
+            <a:off x="640080" y="1207008"/>
+            <a:ext cx="10911535" cy="457200"/>
+          </a:xfrm>
+          <a:prstGeom prst="rect">
+            <a:avLst/>
+          </a:prstGeom>
+          <a:noFill/>
+        </p:spPr>
+        <p:txBody>
+          <a:bodyPr wrap="square" lIns="0" rIns="0" tIns="0" bIns="0" anchor="t">
+            <a:spAutoFit/>
+          </a:bodyPr>
+          <a:lstStyle/>
+          <a:p>
+            <a:pPr algn="l">
+              <a:lnSpc>
+                <a:spcPct val="100000"/>
+              </a:lnSpc>
+            </a:pPr>
+            <a:r>
+              <a:rPr sz="1500" b="0" i="1">
+                <a:solidFill>
+                  <a:srgbClr val="6B748C"/>
+                </a:solidFill>
+                <a:latin typeface="Calibri"/>
+              </a:rPr>
+              <a:t>553 exp89 proteins, paired. Four arms differ ONLY in loss_weights.</a:t>
+            </a:r>
+          </a:p>
+        </p:txBody>
+      </p:sp>
+      <p:graphicFrame>
+        <p:nvGraphicFramePr>
+          <p:cNvPr id="4" name="Table 3"/>
+          <p:cNvGraphicFramePr>
+            <a:graphicFrameLocks noGrp="1"/>
+          </p:cNvGraphicFramePr>
+          <p:nvPr/>
+        </p:nvGraphicFramePr>
+        <p:xfrm>
+          <a:off x="685800" y="1828800"/>
+          <a:ext cx="10835640" cy="2075688"/>
+        </p:xfrm>
+        <a:graphic>
+          <a:graphicData uri="http://schemas.openxmlformats.org/drawingml/2006/table">
+            <a:tbl>
+              <a:tblPr firstRow="1" bandRow="1">
+                <a:tableStyleId>{5C22544A-7EE6-4342-B048-85BDC9FD1C3A}</a:tableStyleId>
+              </a:tblPr>
+              <a:tblGrid>
+                <a:gridCol w="3291840"/>
+                <a:gridCol w="1463040"/>
+                <a:gridCol w="1737360"/>
+                <a:gridCol w="1554480"/>
+                <a:gridCol w="1234440"/>
+                <a:gridCol w="1554480"/>
+              </a:tblGrid>
+              <a:tr h="384048">
+                <a:tc>
+                  <a:txBody>
+                    <a:bodyPr wrap="square"/>
+                    <a:lstStyle/>
+                    <a:p>
+                      <a:pPr algn="l"/>
+                      <a:r>
+                        <a:rPr sz="1250" b="1">
+                          <a:solidFill>
+                            <a:srgbClr val="FFFFFF"/>
+                          </a:solidFill>
+                          <a:latin typeface="Calibri"/>
+                        </a:rPr>
+                        <a:t>model (header/draft/final)</a:t>
+                      </a:r>
+                    </a:p>
+                  </a:txBody>
+                  <a:tcPr marL="91440" marR="73152" marT="27432" marB="27432" anchor="ctr">
+                    <a:solidFill>
+                      <a:srgbClr val="21295C"/>
+                    </a:solidFill>
+                  </a:tcPr>
+                </a:tc>
+                <a:tc>
+                  <a:txBody>
+                    <a:bodyPr wrap="square"/>
+                    <a:lstStyle/>
+                    <a:p>
+                      <a:pPr algn="ctr"/>
+                      <a:r>
+                        <a:rPr sz="1250" b="1">
+                          <a:solidFill>
+                            <a:srgbClr val="FFFFFF"/>
+                          </a:solidFill>
+                          <a:latin typeface="Calibri"/>
+                        </a:rPr>
+                        <a:t>K0</a:t>
+                      </a:r>
+                    </a:p>
+                  </a:txBody>
+                  <a:tcPr marL="91440" marR="73152" marT="27432" marB="27432" anchor="ctr">
+                    <a:solidFill>
+                      <a:srgbClr val="21295C"/>
+                    </a:solidFill>
+                  </a:tcPr>
+                </a:tc>
+                <a:tc>
+                  <a:txBody>
+                    <a:bodyPr wrap="square"/>
+                    <a:lstStyle/>
+                    <a:p>
+                      <a:pPr algn="ctr"/>
+                      <a:r>
+                        <a:rPr sz="1250" b="1">
+                          <a:solidFill>
+                            <a:srgbClr val="FFFFFF"/>
+                          </a:solidFill>
+                          <a:latin typeface="Calibri"/>
+                        </a:rPr>
+                        <a:t>consensus</a:t>
+                      </a:r>
+                    </a:p>
+                  </a:txBody>
+                  <a:tcPr marL="91440" marR="73152" marT="27432" marB="27432" anchor="ctr">
+                    <a:solidFill>
+                      <a:srgbClr val="21295C"/>
+                    </a:solidFill>
+                  </a:tcPr>
+                </a:tc>
+                <a:tc>
+                  <a:txBody>
+                    <a:bodyPr wrap="square"/>
+                    <a:lstStyle/>
+                    <a:p>
+                      <a:pPr algn="ctr"/>
+                      <a:r>
+                        <a:rPr sz="1250" b="1">
+                          <a:solidFill>
+                            <a:srgbClr val="FFFFFF"/>
+                          </a:solidFill>
+                          <a:latin typeface="Calibri"/>
+                        </a:rPr>
+                        <a:t>cons − K0</a:t>
+                      </a:r>
+                    </a:p>
+                  </a:txBody>
+                  <a:tcPr marL="91440" marR="73152" marT="27432" marB="27432" anchor="ctr">
+                    <a:solidFill>
+                      <a:srgbClr val="21295C"/>
+                    </a:solidFill>
+                  </a:tcPr>
+                </a:tc>
+                <a:tc>
+                  <a:txBody>
+                    <a:bodyPr wrap="square"/>
+                    <a:lstStyle/>
+                    <a:p>
+                      <a:pPr algn="ctr"/>
+                      <a:r>
+                        <a:rPr sz="1250" b="1">
+                          <a:solidFill>
+                            <a:srgbClr val="FFFFFF"/>
+                          </a:solidFill>
+                          <a:latin typeface="Calibri"/>
+                        </a:rPr>
+                        <a:t>wins</a:t>
+                      </a:r>
+                    </a:p>
+                  </a:txBody>
+                  <a:tcPr marL="91440" marR="73152" marT="27432" marB="27432" anchor="ctr">
+                    <a:solidFill>
+                      <a:srgbClr val="21295C"/>
+                    </a:solidFill>
+                  </a:tcPr>
+                </a:tc>
+                <a:tc>
+                  <a:txBody>
+                    <a:bodyPr wrap="square"/>
+                    <a:lstStyle/>
+                    <a:p>
+                      <a:pPr algn="ctr"/>
+                      <a:r>
+                        <a:rPr sz="1250" b="1">
+                          <a:solidFill>
+                            <a:srgbClr val="FFFFFF"/>
+                          </a:solidFill>
+                          <a:latin typeface="Calibri"/>
+                        </a:rPr>
+                        <a:t>K0 vs base</a:t>
+                      </a:r>
+                    </a:p>
+                  </a:txBody>
+                  <a:tcPr marL="91440" marR="73152" marT="27432" marB="27432" anchor="ctr">
+                    <a:solidFill>
+                      <a:srgbClr val="21295C"/>
+                    </a:solidFill>
+                  </a:tcPr>
+                </a:tc>
+              </a:tr>
+              <a:tr h="338328">
+                <a:tc>
+                  <a:txBody>
+                    <a:bodyPr wrap="square"/>
+                    <a:lstStyle/>
+                    <a:p>
+                      <a:pPr algn="l"/>
+                      <a:r>
+                        <a:rPr sz="1250" b="0">
+                          <a:solidFill>
+                            <a:srgbClr val="1A1F36"/>
+                          </a:solidFill>
+                          <a:latin typeface="Calibri"/>
+                        </a:rPr>
+                        <a:t>base</a:t>
+                      </a:r>
+                    </a:p>
+                  </a:txBody>
+                  <a:tcPr marL="91440" marR="73152" marT="27432" marB="27432" anchor="ctr">
+                    <a:solidFill>
+                      <a:srgbClr val="FFFFFF"/>
+                    </a:solidFill>
+                  </a:tcPr>
+                </a:tc>
+                <a:tc>
+                  <a:txBody>
+                    <a:bodyPr wrap="square"/>
+                    <a:lstStyle/>
+                    <a:p>
+                      <a:pPr algn="ctr"/>
+                      <a:r>
+                        <a:rPr sz="1250" b="1">
+                          <a:solidFill>
+                            <a:srgbClr val="E88B2F"/>
+                          </a:solidFill>
+                          <a:latin typeface="Calibri"/>
+                        </a:rPr>
+                        <a:t>0.3355</a:t>
+                      </a:r>
+                    </a:p>
+                  </a:txBody>
+                  <a:tcPr marL="91440" marR="73152" marT="27432" marB="27432" anchor="ctr">
+                    <a:solidFill>
+                      <a:srgbClr val="FFFFFF"/>
+                    </a:solidFill>
+                  </a:tcPr>
+                </a:tc>
+                <a:tc>
+                  <a:txBody>
+                    <a:bodyPr wrap="square"/>
+                    <a:lstStyle/>
+                    <a:p>
+                      <a:pPr algn="ctr"/>
+                      <a:r>
+                        <a:rPr sz="1250" b="0">
+                          <a:solidFill>
+                            <a:srgbClr val="1A1F36"/>
+                          </a:solidFill>
+                          <a:latin typeface="Calibri"/>
+                        </a:rPr>
+                        <a:t>0.2020</a:t>
+                      </a:r>
+                    </a:p>
+                  </a:txBody>
+                  <a:tcPr marL="91440" marR="73152" marT="27432" marB="27432" anchor="ctr">
+                    <a:solidFill>
+                      <a:srgbClr val="FFFFFF"/>
+                    </a:solidFill>
+                  </a:tcPr>
+                </a:tc>
+                <a:tc>
+                  <a:txBody>
+                    <a:bodyPr wrap="square"/>
+                    <a:lstStyle/>
+                    <a:p>
+                      <a:pPr algn="ctr"/>
+                      <a:r>
+                        <a:rPr sz="1250" b="0">
+                          <a:solidFill>
+                            <a:srgbClr val="1A1F36"/>
+                          </a:solidFill>
+                          <a:latin typeface="Calibri"/>
+                        </a:rPr>
+                        <a:t>−0.1335</a:t>
+                      </a:r>
+                    </a:p>
+                  </a:txBody>
+                  <a:tcPr marL="91440" marR="73152" marT="27432" marB="27432" anchor="ctr">
+                    <a:solidFill>
+                      <a:srgbClr val="FFFFFF"/>
+                    </a:solidFill>
+                  </a:tcPr>
+                </a:tc>
+                <a:tc>
+                  <a:txBody>
+                    <a:bodyPr wrap="square"/>
+                    <a:lstStyle/>
+                    <a:p>
+                      <a:pPr algn="ctr"/>
+                      <a:r>
+                        <a:rPr sz="1250" b="0">
+                          <a:solidFill>
+                            <a:srgbClr val="1A1F36"/>
+                          </a:solidFill>
+                          <a:latin typeface="Calibri"/>
+                        </a:rPr>
+                        <a:t>9%</a:t>
+                      </a:r>
+                    </a:p>
+                  </a:txBody>
+                  <a:tcPr marL="91440" marR="73152" marT="27432" marB="27432" anchor="ctr">
+                    <a:solidFill>
+                      <a:srgbClr val="FFFFFF"/>
+                    </a:solidFill>
+                  </a:tcPr>
+                </a:tc>
+                <a:tc>
+                  <a:txBody>
+                    <a:bodyPr wrap="square"/>
+                    <a:lstStyle/>
+                    <a:p>
+                      <a:pPr algn="ctr"/>
+                      <a:r>
+                        <a:rPr sz="1250" b="0">
+                          <a:solidFill>
+                            <a:srgbClr val="1A1F36"/>
+                          </a:solidFill>
+                          <a:latin typeface="Calibri"/>
+                        </a:rPr>
+                        <a:t>—</a:t>
+                      </a:r>
+                    </a:p>
+                  </a:txBody>
+                  <a:tcPr marL="91440" marR="73152" marT="27432" marB="27432" anchor="ctr">
+                    <a:solidFill>
+                      <a:srgbClr val="FFFFFF"/>
+                    </a:solidFill>
+                  </a:tcPr>
+                </a:tc>
+              </a:tr>
+              <a:tr h="338328">
+                <a:tc>
+                  <a:txBody>
+                    <a:bodyPr wrap="square"/>
+                    <a:lstStyle/>
+                    <a:p>
+                      <a:pPr algn="l"/>
+                      <a:r>
+                        <a:rPr sz="1250" b="0">
+                          <a:solidFill>
+                            <a:srgbClr val="1A1F36"/>
+                          </a:solidFill>
+                          <a:latin typeface="Calibri"/>
+                        </a:rPr>
+                        <a:t>mdA  (0 / 0 / 1)</a:t>
+                      </a:r>
+                    </a:p>
+                  </a:txBody>
+                  <a:tcPr marL="91440" marR="73152" marT="27432" marB="27432" anchor="ctr">
+                    <a:solidFill>
+                      <a:srgbClr val="F1F5F9"/>
+                    </a:solidFill>
+                  </a:tcPr>
+                </a:tc>
+                <a:tc>
+                  <a:txBody>
+                    <a:bodyPr wrap="square"/>
+                    <a:lstStyle/>
+                    <a:p>
+                      <a:pPr algn="ctr"/>
+                      <a:r>
+                        <a:rPr sz="1250" b="0">
+                          <a:solidFill>
+                            <a:srgbClr val="1A1F36"/>
+                          </a:solidFill>
+                          <a:latin typeface="Calibri"/>
+                        </a:rPr>
+                        <a:t>0.1884</a:t>
+                      </a:r>
+                    </a:p>
+                  </a:txBody>
+                  <a:tcPr marL="91440" marR="73152" marT="27432" marB="27432" anchor="ctr">
+                    <a:solidFill>
+                      <a:srgbClr val="F1F5F9"/>
+                    </a:solidFill>
+                  </a:tcPr>
+                </a:tc>
+                <a:tc>
+                  <a:txBody>
+                    <a:bodyPr wrap="square"/>
+                    <a:lstStyle/>
+                    <a:p>
+                      <a:pPr algn="ctr"/>
+                      <a:r>
+                        <a:rPr sz="1250" b="0">
+                          <a:solidFill>
+                            <a:srgbClr val="1A1F36"/>
+                          </a:solidFill>
+                          <a:latin typeface="Calibri"/>
+                        </a:rPr>
+                        <a:t>0.1483</a:t>
+                      </a:r>
+                    </a:p>
+                  </a:txBody>
+                  <a:tcPr marL="91440" marR="73152" marT="27432" marB="27432" anchor="ctr">
+                    <a:solidFill>
+                      <a:srgbClr val="F1F5F9"/>
+                    </a:solidFill>
+                  </a:tcPr>
+                </a:tc>
+                <a:tc>
+                  <a:txBody>
+                    <a:bodyPr wrap="square"/>
+                    <a:lstStyle/>
+                    <a:p>
+                      <a:pPr algn="ctr"/>
+                      <a:r>
+                        <a:rPr sz="1250" b="0">
+                          <a:solidFill>
+                            <a:srgbClr val="1A1F36"/>
+                          </a:solidFill>
+                          <a:latin typeface="Calibri"/>
+                        </a:rPr>
+                        <a:t>−0.0402</a:t>
+                      </a:r>
+                    </a:p>
+                  </a:txBody>
+                  <a:tcPr marL="91440" marR="73152" marT="27432" marB="27432" anchor="ctr">
+                    <a:solidFill>
+                      <a:srgbClr val="F1F5F9"/>
+                    </a:solidFill>
+                  </a:tcPr>
+                </a:tc>
+                <a:tc>
+                  <a:txBody>
+                    <a:bodyPr wrap="square"/>
+                    <a:lstStyle/>
+                    <a:p>
+                      <a:pPr algn="ctr"/>
+                      <a:r>
+                        <a:rPr sz="1250" b="0">
+                          <a:solidFill>
+                            <a:srgbClr val="1A1F36"/>
+                          </a:solidFill>
+                          <a:latin typeface="Calibri"/>
+                        </a:rPr>
+                        <a:t>38%</a:t>
+                      </a:r>
+                    </a:p>
+                  </a:txBody>
+                  <a:tcPr marL="91440" marR="73152" marT="27432" marB="27432" anchor="ctr">
+                    <a:solidFill>
+                      <a:srgbClr val="F1F5F9"/>
+                    </a:solidFill>
+                  </a:tcPr>
+                </a:tc>
+                <a:tc>
+                  <a:txBody>
+                    <a:bodyPr wrap="square"/>
+                    <a:lstStyle/>
+                    <a:p>
+                      <a:pPr algn="ctr"/>
+                      <a:r>
+                        <a:rPr sz="1250" b="0">
+                          <a:solidFill>
+                            <a:srgbClr val="1A1F36"/>
+                          </a:solidFill>
+                          <a:latin typeface="Calibri"/>
+                        </a:rPr>
+                        <a:t>−43.8%</a:t>
+                      </a:r>
+                    </a:p>
+                  </a:txBody>
+                  <a:tcPr marL="91440" marR="73152" marT="27432" marB="27432" anchor="ctr">
+                    <a:solidFill>
+                      <a:srgbClr val="F1F5F9"/>
+                    </a:solidFill>
+                  </a:tcPr>
+                </a:tc>
+              </a:tr>
+              <a:tr h="338328">
+                <a:tc>
+                  <a:txBody>
+                    <a:bodyPr wrap="square"/>
+                    <a:lstStyle/>
+                    <a:p>
+                      <a:pPr algn="l"/>
+                      <a:r>
+                        <a:rPr sz="1250" b="0">
+                          <a:solidFill>
+                            <a:srgbClr val="1A1F36"/>
+                          </a:solidFill>
+                          <a:latin typeface="Calibri"/>
+                        </a:rPr>
+                        <a:t>mdB  (0.1 / 0 / 1)</a:t>
+                      </a:r>
+                    </a:p>
+                  </a:txBody>
+                  <a:tcPr marL="91440" marR="73152" marT="27432" marB="27432" anchor="ctr">
+                    <a:solidFill>
+                      <a:srgbClr val="FFFFFF"/>
+                    </a:solidFill>
+                  </a:tcPr>
+                </a:tc>
+                <a:tc>
+                  <a:txBody>
+                    <a:bodyPr wrap="square"/>
+                    <a:lstStyle/>
+                    <a:p>
+                      <a:pPr algn="ctr"/>
+                      <a:r>
+                        <a:rPr sz="1250" b="0">
+                          <a:solidFill>
+                            <a:srgbClr val="1A1F36"/>
+                          </a:solidFill>
+                          <a:latin typeface="Calibri"/>
+                        </a:rPr>
+                        <a:t>0.1870</a:t>
+                      </a:r>
+                    </a:p>
+                  </a:txBody>
+                  <a:tcPr marL="91440" marR="73152" marT="27432" marB="27432" anchor="ctr">
+                    <a:solidFill>
+                      <a:srgbClr val="FFFFFF"/>
+                    </a:solidFill>
+                  </a:tcPr>
+                </a:tc>
+                <a:tc>
+                  <a:txBody>
+                    <a:bodyPr wrap="square"/>
+                    <a:lstStyle/>
+                    <a:p>
+                      <a:pPr algn="ctr"/>
+                      <a:r>
+                        <a:rPr sz="1250" b="0">
+                          <a:solidFill>
+                            <a:srgbClr val="1A1F36"/>
+                          </a:solidFill>
+                          <a:latin typeface="Calibri"/>
+                        </a:rPr>
+                        <a:t>0.1524</a:t>
+                      </a:r>
+                    </a:p>
+                  </a:txBody>
+                  <a:tcPr marL="91440" marR="73152" marT="27432" marB="27432" anchor="ctr">
+                    <a:solidFill>
+                      <a:srgbClr val="FFFFFF"/>
+                    </a:solidFill>
+                  </a:tcPr>
+                </a:tc>
+                <a:tc>
+                  <a:txBody>
+                    <a:bodyPr wrap="square"/>
+                    <a:lstStyle/>
+                    <a:p>
+                      <a:pPr algn="ctr"/>
+                      <a:r>
+                        <a:rPr sz="1250" b="0">
+                          <a:solidFill>
+                            <a:srgbClr val="1A1F36"/>
+                          </a:solidFill>
+                          <a:latin typeface="Calibri"/>
+                        </a:rPr>
+                        <a:t>−0.0346</a:t>
+                      </a:r>
+                    </a:p>
+                  </a:txBody>
+                  <a:tcPr marL="91440" marR="73152" marT="27432" marB="27432" anchor="ctr">
+                    <a:solidFill>
+                      <a:srgbClr val="FFFFFF"/>
+                    </a:solidFill>
+                  </a:tcPr>
+                </a:tc>
+                <a:tc>
+                  <a:txBody>
+                    <a:bodyPr wrap="square"/>
+                    <a:lstStyle/>
+                    <a:p>
+                      <a:pPr algn="ctr"/>
+                      <a:r>
+                        <a:rPr sz="1250" b="0">
+                          <a:solidFill>
+                            <a:srgbClr val="1A1F36"/>
+                          </a:solidFill>
+                          <a:latin typeface="Calibri"/>
+                        </a:rPr>
+                        <a:t>40%</a:t>
+                      </a:r>
+                    </a:p>
+                  </a:txBody>
+                  <a:tcPr marL="91440" marR="73152" marT="27432" marB="27432" anchor="ctr">
+                    <a:solidFill>
+                      <a:srgbClr val="FFFFFF"/>
+                    </a:solidFill>
+                  </a:tcPr>
+                </a:tc>
+                <a:tc>
+                  <a:txBody>
+                    <a:bodyPr wrap="square"/>
+                    <a:lstStyle/>
+                    <a:p>
+                      <a:pPr algn="ctr"/>
+                      <a:r>
+                        <a:rPr sz="1250" b="0">
+                          <a:solidFill>
+                            <a:srgbClr val="1A1F36"/>
+                          </a:solidFill>
+                          <a:latin typeface="Calibri"/>
+                        </a:rPr>
+                        <a:t>−44.3%</a:t>
+                      </a:r>
+                    </a:p>
+                  </a:txBody>
+                  <a:tcPr marL="91440" marR="73152" marT="27432" marB="27432" anchor="ctr">
+                    <a:solidFill>
+                      <a:srgbClr val="FFFFFF"/>
+                    </a:solidFill>
+                  </a:tcPr>
+                </a:tc>
+              </a:tr>
+              <a:tr h="338328">
+                <a:tc>
+                  <a:txBody>
+                    <a:bodyPr wrap="square"/>
+                    <a:lstStyle/>
+                    <a:p>
+                      <a:pPr algn="l"/>
+                      <a:r>
+                        <a:rPr sz="1250" b="0">
+                          <a:solidFill>
+                            <a:srgbClr val="1A1F36"/>
+                          </a:solidFill>
+                          <a:latin typeface="Calibri"/>
+                        </a:rPr>
+                        <a:t>mdC  (0.1 / 0.1 / 1)</a:t>
+                      </a:r>
+                    </a:p>
+                  </a:txBody>
+                  <a:tcPr marL="91440" marR="73152" marT="27432" marB="27432" anchor="ctr">
+                    <a:solidFill>
+                      <a:srgbClr val="F1F5F9"/>
+                    </a:solidFill>
+                  </a:tcPr>
+                </a:tc>
+                <a:tc>
+                  <a:txBody>
+                    <a:bodyPr wrap="square"/>
+                    <a:lstStyle/>
+                    <a:p>
+                      <a:pPr algn="ctr"/>
+                      <a:r>
+                        <a:rPr sz="1250" b="0">
+                          <a:solidFill>
+                            <a:srgbClr val="1A1F36"/>
+                          </a:solidFill>
+                          <a:latin typeface="Calibri"/>
+                        </a:rPr>
+                        <a:t>0.1879</a:t>
+                      </a:r>
+                    </a:p>
+                  </a:txBody>
+                  <a:tcPr marL="91440" marR="73152" marT="27432" marB="27432" anchor="ctr">
+                    <a:solidFill>
+                      <a:srgbClr val="F1F5F9"/>
+                    </a:solidFill>
+                  </a:tcPr>
+                </a:tc>
+                <a:tc>
+                  <a:txBody>
+                    <a:bodyPr wrap="square"/>
+                    <a:lstStyle/>
+                    <a:p>
+                      <a:pPr algn="ctr"/>
+                      <a:r>
+                        <a:rPr sz="1250" b="0">
+                          <a:solidFill>
+                            <a:srgbClr val="1A1F36"/>
+                          </a:solidFill>
+                          <a:latin typeface="Calibri"/>
+                        </a:rPr>
+                        <a:t>0.1549</a:t>
+                      </a:r>
+                    </a:p>
+                  </a:txBody>
+                  <a:tcPr marL="91440" marR="73152" marT="27432" marB="27432" anchor="ctr">
+                    <a:solidFill>
+                      <a:srgbClr val="F1F5F9"/>
+                    </a:solidFill>
+                  </a:tcPr>
+                </a:tc>
+                <a:tc>
+                  <a:txBody>
+                    <a:bodyPr wrap="square"/>
+                    <a:lstStyle/>
+                    <a:p>
+                      <a:pPr algn="ctr"/>
+                      <a:r>
+                        <a:rPr sz="1250" b="0">
+                          <a:solidFill>
+                            <a:srgbClr val="1A1F36"/>
+                          </a:solidFill>
+                          <a:latin typeface="Calibri"/>
+                        </a:rPr>
+                        <a:t>−0.0331</a:t>
+                      </a:r>
+                    </a:p>
+                  </a:txBody>
+                  <a:tcPr marL="91440" marR="73152" marT="27432" marB="27432" anchor="ctr">
+                    <a:solidFill>
+                      <a:srgbClr val="F1F5F9"/>
+                    </a:solidFill>
+                  </a:tcPr>
+                </a:tc>
+                <a:tc>
+                  <a:txBody>
+                    <a:bodyPr wrap="square"/>
+                    <a:lstStyle/>
+                    <a:p>
+                      <a:pPr algn="ctr"/>
+                      <a:r>
+                        <a:rPr sz="1250" b="0">
+                          <a:solidFill>
+                            <a:srgbClr val="1A1F36"/>
+                          </a:solidFill>
+                          <a:latin typeface="Calibri"/>
+                        </a:rPr>
+                        <a:t>42%</a:t>
+                      </a:r>
+                    </a:p>
+                  </a:txBody>
+                  <a:tcPr marL="91440" marR="73152" marT="27432" marB="27432" anchor="ctr">
+                    <a:solidFill>
+                      <a:srgbClr val="F1F5F9"/>
+                    </a:solidFill>
+                  </a:tcPr>
+                </a:tc>
+                <a:tc>
+                  <a:txBody>
+                    <a:bodyPr wrap="square"/>
+                    <a:lstStyle/>
+                    <a:p>
+                      <a:pPr algn="ctr"/>
+                      <a:r>
+                        <a:rPr sz="1250" b="0">
+                          <a:solidFill>
+                            <a:srgbClr val="1A1F36"/>
+                          </a:solidFill>
+                          <a:latin typeface="Calibri"/>
+                        </a:rPr>
+                        <a:t>−44.0%</a:t>
+                      </a:r>
+                    </a:p>
+                  </a:txBody>
+                  <a:tcPr marL="91440" marR="73152" marT="27432" marB="27432" anchor="ctr">
+                    <a:solidFill>
+                      <a:srgbClr val="F1F5F9"/>
+                    </a:solidFill>
+                  </a:tcPr>
+                </a:tc>
+              </a:tr>
+              <a:tr h="338328">
+                <a:tc>
+                  <a:txBody>
+                    <a:bodyPr wrap="square"/>
+                    <a:lstStyle/>
+                    <a:p>
+                      <a:pPr algn="l"/>
+                      <a:r>
+                        <a:rPr sz="1250" b="0">
+                          <a:solidFill>
+                            <a:srgbClr val="1A1F36"/>
+                          </a:solidFill>
+                          <a:latin typeface="Calibri"/>
+                        </a:rPr>
+                        <a:t>mdD  (0.1 / 0.3 / 1)</a:t>
+                      </a:r>
+                    </a:p>
+                  </a:txBody>
+                  <a:tcPr marL="91440" marR="73152" marT="27432" marB="27432" anchor="ctr">
+                    <a:solidFill>
+                      <a:srgbClr val="FFFFFF"/>
+                    </a:solidFill>
+                  </a:tcPr>
+                </a:tc>
+                <a:tc>
+                  <a:txBody>
+                    <a:bodyPr wrap="square"/>
+                    <a:lstStyle/>
+                    <a:p>
+                      <a:pPr algn="ctr"/>
+                      <a:r>
+                        <a:rPr sz="1250" b="0">
+                          <a:solidFill>
+                            <a:srgbClr val="1A1F36"/>
+                          </a:solidFill>
+                          <a:latin typeface="Calibri"/>
+                        </a:rPr>
+                        <a:t>0.1886</a:t>
+                      </a:r>
+                    </a:p>
+                  </a:txBody>
+                  <a:tcPr marL="91440" marR="73152" marT="27432" marB="27432" anchor="ctr">
+                    <a:solidFill>
+                      <a:srgbClr val="FFFFFF"/>
+                    </a:solidFill>
+                  </a:tcPr>
+                </a:tc>
+                <a:tc>
+                  <a:txBody>
+                    <a:bodyPr wrap="square"/>
+                    <a:lstStyle/>
+                    <a:p>
+                      <a:pPr algn="ctr"/>
+                      <a:r>
+                        <a:rPr sz="1250" b="0">
+                          <a:solidFill>
+                            <a:srgbClr val="1A1F36"/>
+                          </a:solidFill>
+                          <a:latin typeface="Calibri"/>
+                        </a:rPr>
+                        <a:t>0.1509</a:t>
+                      </a:r>
+                    </a:p>
+                  </a:txBody>
+                  <a:tcPr marL="91440" marR="73152" marT="27432" marB="27432" anchor="ctr">
+                    <a:solidFill>
+                      <a:srgbClr val="FFFFFF"/>
+                    </a:solidFill>
+                  </a:tcPr>
+                </a:tc>
+                <a:tc>
+                  <a:txBody>
+                    <a:bodyPr wrap="square"/>
+                    <a:lstStyle/>
+                    <a:p>
+                      <a:pPr algn="ctr"/>
+                      <a:r>
+                        <a:rPr sz="1250" b="0">
+                          <a:solidFill>
+                            <a:srgbClr val="1A1F36"/>
+                          </a:solidFill>
+                          <a:latin typeface="Calibri"/>
+                        </a:rPr>
+                        <a:t>−0.0378</a:t>
+                      </a:r>
+                    </a:p>
+                  </a:txBody>
+                  <a:tcPr marL="91440" marR="73152" marT="27432" marB="27432" anchor="ctr">
+                    <a:solidFill>
+                      <a:srgbClr val="FFFFFF"/>
+                    </a:solidFill>
+                  </a:tcPr>
+                </a:tc>
+                <a:tc>
+                  <a:txBody>
+                    <a:bodyPr wrap="square"/>
+                    <a:lstStyle/>
+                    <a:p>
+                      <a:pPr algn="ctr"/>
+                      <a:r>
+                        <a:rPr sz="1250" b="0">
+                          <a:solidFill>
+                            <a:srgbClr val="1A1F36"/>
+                          </a:solidFill>
+                          <a:latin typeface="Calibri"/>
+                        </a:rPr>
+                        <a:t>40%</a:t>
+                      </a:r>
+                    </a:p>
+                  </a:txBody>
+                  <a:tcPr marL="91440" marR="73152" marT="27432" marB="27432" anchor="ctr">
+                    <a:solidFill>
+                      <a:srgbClr val="FFFFFF"/>
+                    </a:solidFill>
+                  </a:tcPr>
+                </a:tc>
+                <a:tc>
+                  <a:txBody>
+                    <a:bodyPr wrap="square"/>
+                    <a:lstStyle/>
+                    <a:p>
+                      <a:pPr algn="ctr"/>
+                      <a:r>
+                        <a:rPr sz="1250" b="0">
+                          <a:solidFill>
+                            <a:srgbClr val="1A1F36"/>
+                          </a:solidFill>
+                          <a:latin typeface="Calibri"/>
+                        </a:rPr>
+                        <a:t>−43.8%</a:t>
+                      </a:r>
+                    </a:p>
+                  </a:txBody>
+                  <a:tcPr marL="91440" marR="73152" marT="27432" marB="27432" anchor="ctr">
+                    <a:solidFill>
+                      <a:srgbClr val="FFFFFF"/>
+                    </a:solidFill>
+                  </a:tcPr>
+                </a:tc>
+              </a:tr>
+            </a:tbl>
+          </a:graphicData>
+        </a:graphic>
+      </p:graphicFrame>
+      <p:sp>
+        <p:nvSpPr>
+          <p:cNvPr id="5" name="Oval 4"/>
           <p:cNvSpPr/>
           <p:nvPr/>
         </p:nvSpPr>
         <p:spPr>
           <a:xfrm>
-            <a:off x="4434840" y="2011680"/>
-            <a:ext cx="3246120" cy="1691640"/>
-          </a:xfrm>
-          <a:prstGeom prst="roundRect">
-            <a:avLst>
-              <a:gd name="adj" fmla="val 6000"/>
-            </a:avLst>
+            <a:off x="777240" y="4343400"/>
+            <a:ext cx="347472" cy="347472"/>
+          </a:xfrm>
+          <a:prstGeom prst="ellipse">
+            <a:avLst/>
           </a:prstGeom>
           <a:solidFill>
-            <a:srgbClr val="2E3874"/>
+            <a:srgbClr val="C44536"/>
           </a:solidFill>
           <a:ln>
             <a:noFill/>
@@ -9721,19 +11088,30 @@
         <p:txBody>
           <a:bodyPr rtlCol="0" anchor="ctr"/>
           <a:lstStyle/>
-          <a:p/>
-        </p:txBody>
-      </p:sp>
-      <p:sp>
-        <p:nvSpPr>
-          <p:cNvPr id="8" name="TextBox 7"/>
+          <a:p>
+            <a:pPr algn="ctr"/>
+            <a:r>
+              <a:rPr sz="1700" b="1">
+                <a:solidFill>
+                  <a:srgbClr val="FFFFFF"/>
+                </a:solidFill>
+                <a:latin typeface="Calibri"/>
+              </a:rPr>
+              <a:t>1</a:t>
+            </a:r>
+          </a:p>
+        </p:txBody>
+      </p:sp>
+      <p:sp>
+        <p:nvSpPr>
+          <p:cNvPr id="6" name="TextBox 5"/>
           <p:cNvSpPr txBox="1"/>
           <p:nvPr/>
         </p:nvSpPr>
         <p:spPr>
           <a:xfrm>
-            <a:off x="4434840" y="2240280"/>
-            <a:ext cx="3246120" cy="731520"/>
+            <a:off x="1280160" y="4379976"/>
+            <a:ext cx="10058400" cy="457200"/>
           </a:xfrm>
           <a:prstGeom prst="rect">
             <a:avLst/>
@@ -9746,80 +11124,39 @@
           </a:bodyPr>
           <a:lstStyle/>
           <a:p>
-            <a:pPr algn="ctr">
+            <a:pPr algn="l">
               <a:lnSpc>
                 <a:spcPct val="100000"/>
               </a:lnSpc>
             </a:pPr>
             <a:r>
-              <a:rPr sz="3400" b="1" i="0">
-                <a:solidFill>
-                  <a:srgbClr val="FFFFFF"/>
-                </a:solidFill>
-                <a:latin typeface="Cambria"/>
-              </a:rPr>
-              <a:t>~1,700</a:t>
-            </a:r>
-          </a:p>
-        </p:txBody>
-      </p:sp>
-      <p:sp>
-        <p:nvSpPr>
-          <p:cNvPr id="9" name="TextBox 8"/>
-          <p:cNvSpPr txBox="1"/>
-          <p:nvPr/>
-        </p:nvSpPr>
-        <p:spPr>
-          <a:xfrm>
-            <a:off x="4434840" y="3017520"/>
-            <a:ext cx="3246120" cy="457200"/>
-          </a:xfrm>
-          <a:prstGeom prst="rect">
+              <a:rPr sz="1300" b="0" i="0">
+                <a:solidFill>
+                  <a:srgbClr val="1A1F36"/>
+                </a:solidFill>
+                <a:latin typeface="Calibri"/>
+              </a:rPr>
+              <a:t>Loss-weight profile does NOTHING — all four arms within 0.002 on K0 (mdB−mdA = −0.0014 ± 0.0013: wrong direction, ~40× too small)</a:t>
+            </a:r>
+          </a:p>
+        </p:txBody>
+      </p:sp>
+      <p:sp>
+        <p:nvSpPr>
+          <p:cNvPr id="7" name="Oval 6"/>
+          <p:cNvSpPr/>
+          <p:nvPr/>
+        </p:nvSpPr>
+        <p:spPr>
+          <a:xfrm>
+            <a:off x="777240" y="4910328"/>
+            <a:ext cx="347472" cy="347472"/>
+          </a:xfrm>
+          <a:prstGeom prst="ellipse">
             <a:avLst/>
           </a:prstGeom>
-          <a:noFill/>
-        </p:spPr>
-        <p:txBody>
-          <a:bodyPr wrap="square" lIns="0" rIns="0" tIns="0" bIns="0" anchor="t">
-            <a:spAutoFit/>
-          </a:bodyPr>
-          <a:lstStyle/>
-          <a:p>
-            <a:pPr algn="ctr">
-              <a:lnSpc>
-                <a:spcPct val="100000"/>
-              </a:lnSpc>
-            </a:pPr>
-            <a:r>
-              <a:rPr sz="1250" b="0" i="0">
-                <a:solidFill>
-                  <a:srgbClr val="C9D4E8"/>
-                </a:solidFill>
-                <a:latin typeface="Calibri"/>
-              </a:rPr>
-              <a:t>H100-hours for 1M × 24</a:t>
-            </a:r>
-          </a:p>
-        </p:txBody>
-      </p:sp>
-      <p:sp>
-        <p:nvSpPr>
-          <p:cNvPr id="10" name="Rounded Rectangle 9"/>
-          <p:cNvSpPr/>
-          <p:nvPr/>
-        </p:nvSpPr>
-        <p:spPr>
-          <a:xfrm>
-            <a:off x="8046720" y="2011680"/>
-            <a:ext cx="3246120" cy="1691640"/>
-          </a:xfrm>
-          <a:prstGeom prst="roundRect">
-            <a:avLst>
-              <a:gd name="adj" fmla="val 6000"/>
-            </a:avLst>
-          </a:prstGeom>
           <a:solidFill>
-            <a:srgbClr val="2E3874"/>
+            <a:srgbClr val="C44536"/>
           </a:solidFill>
           <a:ln>
             <a:noFill/>
@@ -9843,19 +11180,30 @@
         <p:txBody>
           <a:bodyPr rtlCol="0" anchor="ctr"/>
           <a:lstStyle/>
-          <a:p/>
-        </p:txBody>
-      </p:sp>
-      <p:sp>
-        <p:nvSpPr>
-          <p:cNvPr id="11" name="TextBox 10"/>
+          <a:p>
+            <a:pPr algn="ctr"/>
+            <a:r>
+              <a:rPr sz="1700" b="1">
+                <a:solidFill>
+                  <a:srgbClr val="FFFFFF"/>
+                </a:solidFill>
+                <a:latin typeface="Calibri"/>
+              </a:rPr>
+              <a:t>2</a:t>
+            </a:r>
+          </a:p>
+        </p:txBody>
+      </p:sp>
+      <p:sp>
+        <p:nvSpPr>
+          <p:cNvPr id="8" name="TextBox 7"/>
           <p:cNvSpPr txBox="1"/>
           <p:nvPr/>
         </p:nvSpPr>
         <p:spPr>
           <a:xfrm>
-            <a:off x="8046720" y="2240280"/>
-            <a:ext cx="3246120" cy="731520"/>
+            <a:off x="1280160" y="4946904"/>
+            <a:ext cx="10058400" cy="457200"/>
           </a:xfrm>
           <a:prstGeom prst="rect">
             <a:avLst/>
@@ -9868,33 +11216,86 @@
           </a:bodyPr>
           <a:lstStyle/>
           <a:p>
-            <a:pPr algn="ctr">
+            <a:pPr algn="l">
               <a:lnSpc>
                 <a:spcPct val="100000"/>
               </a:lnSpc>
             </a:pPr>
             <a:r>
-              <a:rPr sz="3400" b="1" i="0">
-                <a:solidFill>
-                  <a:srgbClr val="9FC4E0"/>
-                </a:solidFill>
-                <a:latin typeface="Cambria"/>
-              </a:rPr>
-              <a:t>~26 h</a:t>
-            </a:r>
-          </a:p>
-        </p:txBody>
-      </p:sp>
-      <p:sp>
-        <p:nvSpPr>
-          <p:cNvPr id="12" name="TextBox 11"/>
+              <a:rPr sz="1300" b="0" i="0">
+                <a:solidFill>
+                  <a:srgbClr val="1A1F36"/>
+                </a:solidFill>
+                <a:latin typeface="Calibri"/>
+              </a:rPr>
+              <a:t>Scale does NOT fix forgetting — 5.3× more docs gave −44% vs v1's −41%</a:t>
+            </a:r>
+          </a:p>
+        </p:txBody>
+      </p:sp>
+      <p:sp>
+        <p:nvSpPr>
+          <p:cNvPr id="9" name="Oval 8"/>
+          <p:cNvSpPr/>
+          <p:nvPr/>
+        </p:nvSpPr>
+        <p:spPr>
+          <a:xfrm>
+            <a:off x="777240" y="5477256"/>
+            <a:ext cx="347472" cy="347472"/>
+          </a:xfrm>
+          <a:prstGeom prst="ellipse">
+            <a:avLst/>
+          </a:prstGeom>
+          <a:solidFill>
+            <a:srgbClr val="C44536"/>
+          </a:solidFill>
+          <a:ln>
+            <a:noFill/>
+          </a:ln>
+          <a:effectLst/>
+        </p:spPr>
+        <p:style>
+          <a:lnRef idx="1">
+            <a:schemeClr val="accent1"/>
+          </a:lnRef>
+          <a:fillRef idx="3">
+            <a:schemeClr val="accent1"/>
+          </a:fillRef>
+          <a:effectRef idx="2">
+            <a:schemeClr val="accent1"/>
+          </a:effectRef>
+          <a:fontRef idx="minor">
+            <a:schemeClr val="lt1"/>
+          </a:fontRef>
+        </p:style>
+        <p:txBody>
+          <a:bodyPr rtlCol="0" anchor="ctr"/>
+          <a:lstStyle/>
+          <a:p>
+            <a:pPr algn="ctr"/>
+            <a:r>
+              <a:rPr sz="1700" b="1">
+                <a:solidFill>
+                  <a:srgbClr val="FFFFFF"/>
+                </a:solidFill>
+                <a:latin typeface="Calibri"/>
+              </a:rPr>
+              <a:t>3</a:t>
+            </a:r>
+          </a:p>
+        </p:txBody>
+      </p:sp>
+      <p:sp>
+        <p:nvSpPr>
+          <p:cNvPr id="10" name="TextBox 9"/>
           <p:cNvSpPr txBox="1"/>
           <p:nvPr/>
         </p:nvSpPr>
         <p:spPr>
           <a:xfrm>
-            <a:off x="8046720" y="3017520"/>
-            <a:ext cx="3246120" cy="457200"/>
+            <a:off x="1280160" y="5513832"/>
+            <a:ext cx="10058400" cy="457200"/>
           </a:xfrm>
           <a:prstGeom prst="rect">
             <a:avLst/>
@@ -9907,33 +11308,194 @@
           </a:bodyPr>
           <a:lstStyle/>
           <a:p>
-            <a:pPr algn="ctr">
+            <a:pPr algn="l">
               <a:lnSpc>
                 <a:spcPct val="100000"/>
               </a:lnSpc>
             </a:pPr>
             <a:r>
-              <a:rPr sz="1250" b="0" i="0">
+              <a:rPr sz="1300" b="0" i="0">
+                <a:solidFill>
+                  <a:srgbClr val="1A1F36"/>
+                </a:solidFill>
+                <a:latin typeface="Calibri"/>
+              </a:rPr>
+              <a:t>The format cost v1's one success — v1 GAINED from consensus (+0.024, 63%); every v2 arm loses (−0.033 to −0.040)</a:t>
+            </a:r>
+          </a:p>
+        </p:txBody>
+      </p:sp>
+      <p:sp>
+        <p:nvSpPr>
+          <p:cNvPr id="11" name="TextBox 10"/>
+          <p:cNvSpPr txBox="1"/>
+          <p:nvPr/>
+        </p:nvSpPr>
+        <p:spPr>
+          <a:xfrm>
+            <a:off x="640080" y="6291072"/>
+            <a:ext cx="10911535" cy="320040"/>
+          </a:xfrm>
+          <a:prstGeom prst="rect">
+            <a:avLst/>
+          </a:prstGeom>
+          <a:noFill/>
+        </p:spPr>
+        <p:txBody>
+          <a:bodyPr wrap="square" lIns="0" rIns="0" tIns="0" bIns="0" anchor="t">
+            <a:spAutoFit/>
+          </a:bodyPr>
+          <a:lstStyle/>
+          <a:p>
+            <a:pPr algn="l">
+              <a:lnSpc>
+                <a:spcPct val="100000"/>
+              </a:lnSpc>
+            </a:pPr>
+            <a:r>
+              <a:rPr sz="1050" b="0" i="1">
+                <a:solidFill>
+                  <a:srgbClr val="6B748C"/>
+                </a:solidFill>
+                <a:latin typeface="Calibri"/>
+              </a:rPr>
+              <a:t>bpb misled a third time: +5% (0.3915 → ~0.411) standing in for a −44% task collapse.</a:t>
+            </a:r>
+          </a:p>
+        </p:txBody>
+      </p:sp>
+    </p:spTree>
+  </p:cSld>
+  <p:clrMapOvr>
+    <a:masterClrMapping/>
+  </p:clrMapOvr>
+</p:sld>
+</file>
+
+<file path=ppt/slides/slide19.xml><?xml version="1.0" encoding="utf-8"?>
+<p:sld xmlns:a="http://schemas.openxmlformats.org/drawingml/2006/main" xmlns:p="http://schemas.openxmlformats.org/presentationml/2006/main" xmlns:r="http://schemas.openxmlformats.org/officeDocument/2006/relationships">
+  <p:cSld>
+    <p:bg>
+      <p:bgPr>
+        <a:solidFill>
+          <a:srgbClr val="21295C"/>
+        </a:solidFill>
+        <a:effectLst/>
+      </p:bgPr>
+    </p:bg>
+    <p:spTree>
+      <p:nvGrpSpPr>
+        <p:cNvPr id="1" name=""/>
+        <p:cNvGrpSpPr/>
+        <p:nvPr/>
+      </p:nvGrpSpPr>
+      <p:grpSpPr/>
+      <p:sp>
+        <p:nvSpPr>
+          <p:cNvPr id="2" name="TextBox 1"/>
+          <p:cNvSpPr txBox="1"/>
+          <p:nvPr/>
+        </p:nvSpPr>
+        <p:spPr>
+          <a:xfrm>
+            <a:off x="640080" y="457200"/>
+            <a:ext cx="10911535" cy="777240"/>
+          </a:xfrm>
+          <a:prstGeom prst="rect">
+            <a:avLst/>
+          </a:prstGeom>
+          <a:noFill/>
+        </p:spPr>
+        <p:txBody>
+          <a:bodyPr wrap="square" lIns="0" rIns="0" tIns="0" bIns="0" anchor="t">
+            <a:spAutoFit/>
+          </a:bodyPr>
+          <a:lstStyle/>
+          <a:p>
+            <a:pPr algn="l">
+              <a:lnSpc>
+                <a:spcPct val="100000"/>
+              </a:lnSpc>
+            </a:pPr>
+            <a:r>
+              <a:rPr sz="3400" b="1" i="0">
+                <a:solidFill>
+                  <a:srgbClr val="FFFFFF"/>
+                </a:solidFill>
+                <a:latin typeface="Cambria"/>
+              </a:rPr>
+              <a:t>The variable that actually matters</a:t>
+            </a:r>
+          </a:p>
+        </p:txBody>
+      </p:sp>
+      <p:sp>
+        <p:nvSpPr>
+          <p:cNvPr id="3" name="TextBox 2"/>
+          <p:cNvSpPr txBox="1"/>
+          <p:nvPr/>
+        </p:nvSpPr>
+        <p:spPr>
+          <a:xfrm>
+            <a:off x="640080" y="1207008"/>
+            <a:ext cx="10911535" cy="457200"/>
+          </a:xfrm>
+          <a:prstGeom prst="rect">
+            <a:avLst/>
+          </a:prstGeom>
+          <a:noFill/>
+        </p:spPr>
+        <p:txBody>
+          <a:bodyPr wrap="square" lIns="0" rIns="0" tIns="0" bIns="0" anchor="t">
+            <a:spAutoFit/>
+          </a:bodyPr>
+          <a:lstStyle/>
+          <a:p>
+            <a:pPr algn="l">
+              <a:lnSpc>
+                <a:spcPct val="100000"/>
+              </a:lnSpc>
+            </a:pPr>
+            <a:r>
+              <a:rPr sz="1500" b="0" i="1">
                 <a:solidFill>
                   <a:srgbClr val="C9D4E8"/>
                 </a:solidFill>
                 <a:latin typeface="Calibri"/>
               </a:rPr>
-              <a:t>wall on 64 shards</a:t>
-            </a:r>
-          </a:p>
-        </p:txBody>
-      </p:sp>
-      <p:sp>
-        <p:nvSpPr>
-          <p:cNvPr id="13" name="TextBox 12"/>
+              <a:t>Everything else was varied and did not move it.</a:t>
+            </a:r>
+          </a:p>
+        </p:txBody>
+      </p:sp>
+      <p:graphicFrame>
+        <p:nvGraphicFramePr>
+          <p:cNvPr id="4" name="Chart 3"/>
+          <p:cNvGraphicFramePr>
+            <a:graphicFrameLocks noGrp="1"/>
+          </p:cNvGraphicFramePr>
+          <p:nvPr/>
+        </p:nvGraphicFramePr>
+        <p:xfrm>
+          <a:off x="822960" y="1965960"/>
+          <a:ext cx="6400800" cy="3657600"/>
+        </p:xfrm>
+        <a:graphic>
+          <a:graphicData uri="http://schemas.openxmlformats.org/drawingml/2006/chart">
+            <c:chart xmlns:c="http://schemas.openxmlformats.org/drawingml/2006/chart" r:id="rId2"/>
+          </a:graphicData>
+        </a:graphic>
+      </p:graphicFrame>
+      <p:sp>
+        <p:nvSpPr>
+          <p:cNvPr id="5" name="TextBox 4"/>
           <p:cNvSpPr txBox="1"/>
           <p:nvPr/>
         </p:nvSpPr>
         <p:spPr>
           <a:xfrm>
-            <a:off x="822960" y="4023360"/>
-            <a:ext cx="10515600" cy="2103120"/>
+            <a:off x="7589520" y="2103120"/>
+            <a:ext cx="3794760" cy="3840480"/>
           </a:xfrm>
           <a:prstGeom prst="rect">
             <a:avLst/>
@@ -9951,26 +11513,26 @@
                 <a:spcPct val="115000"/>
               </a:lnSpc>
               <a:spcAft>
-                <a:spcPts val="1200"/>
+                <a:spcPts val="1300"/>
               </a:spcAft>
             </a:pPr>
             <a:r>
-              <a:rPr sz="1400" b="1">
-                <a:solidFill>
-                  <a:srgbClr val="21295C"/>
+              <a:rPr sz="1300" b="1">
+                <a:solidFill>
+                  <a:srgbClr val="E88B2F"/>
                 </a:solidFill>
                 <a:latin typeface="Calibri"/>
               </a:rPr>
-              <a:t>~2× the earlier estimate. </a:t>
-            </a:r>
-            <a:r>
-              <a:rPr sz="1400">
+              <a:t>LoRA vs full fine-tune. </a:t>
+            </a:r>
+            <a:r>
+              <a:rPr sz="1300">
                 <a:solidFill>
                   <a:srgbClr val="DEE7F5"/>
                 </a:solidFill>
                 <a:latin typeface="Calibri"/>
               </a:rPr>
-              <a:t>The top-k fix roughly doubled rollout length — which is the point (n_pred 201 vs 95), but it doubles the bill.</a:t>
+              <a:t>That is the only discriminating variable across corpus size, fold diversity, document format and loss profile.</a:t>
             </a:r>
           </a:p>
           <a:p>
@@ -9979,26 +11541,26 @@
                 <a:spcPct val="115000"/>
               </a:lnSpc>
               <a:spcAft>
-                <a:spcPts val="1200"/>
+                <a:spcPts val="1300"/>
               </a:spcAft>
             </a:pPr>
             <a:r>
-              <a:rPr sz="1400" b="1">
-                <a:solidFill>
-                  <a:srgbClr val="21295C"/>
+              <a:rPr sz="1300" b="1">
+                <a:solidFill>
+                  <a:srgbClr val="E88B2F"/>
                 </a:solidFill>
                 <a:latin typeface="Calibri"/>
               </a:rPr>
-              <a:t>Is 1M the right number? </a:t>
-            </a:r>
-            <a:r>
-              <a:rPr sz="1400">
+              <a:t>A full FT at lr 1e-4 destroys ~42% of the base contact ability regardless.</a:t>
+            </a:r>
+            <a:r>
+              <a:rPr sz="1300">
                 <a:solidFill>
                   <a:srgbClr val="DEE7F5"/>
                 </a:solidFill>
                 <a:latin typeface="Calibri"/>
               </a:rPr>
-              <a:t>250k proteins is ~420 H100-hours (~26h on 16 shards) and plausibly buys most of the fold diversity for a quarter of the spend.</a:t>
+              <a:t/>
             </a:r>
           </a:p>
           <a:p>
@@ -10007,26 +11569,109 @@
                 <a:spcPct val="115000"/>
               </a:lnSpc>
               <a:spcAft>
-                <a:spcPts val="1200"/>
+                <a:spcPts val="1300"/>
               </a:spcAft>
             </a:pPr>
             <a:r>
-              <a:rPr sz="1400" b="1">
-                <a:solidFill>
-                  <a:srgbClr val="21295C"/>
+              <a:rPr sz="1300" b="1">
+                <a:solidFill>
+                  <a:srgbClr val="E88B2F"/>
                 </a:solidFill>
                 <a:latin typeface="Calibri"/>
               </a:rPr>
-              <a:t>Phase 3 changes the question. </a:t>
-            </a:r>
-            <a:r>
-              <a:rPr sz="1400">
+              <a:t>So the next run is LoRA (or a much lower LR) — not more data, not more weight tuning.</a:t>
+            </a:r>
+            <a:r>
+              <a:rPr sz="1300">
                 <a:solidFill>
                   <a:srgbClr val="DEE7F5"/>
                 </a:solidFill>
                 <a:latin typeface="Calibri"/>
               </a:rPr>
-              <a:t>The kill criterion is met and the binding constraint is forgetting, not data volume — so spending ~1,700 H100-hours on the same recipe would buy a better-trained version of a model that loses to its own base.</a:t>
+              <a:t/>
+            </a:r>
+          </a:p>
+        </p:txBody>
+      </p:sp>
+      <p:sp>
+        <p:nvSpPr>
+          <p:cNvPr id="6" name="Rounded Rectangle 5"/>
+          <p:cNvSpPr/>
+          <p:nvPr/>
+        </p:nvSpPr>
+        <p:spPr>
+          <a:xfrm>
+            <a:off x="7589520" y="5486400"/>
+            <a:ext cx="3794760" cy="685800"/>
+          </a:xfrm>
+          <a:prstGeom prst="roundRect">
+            <a:avLst>
+              <a:gd name="adj" fmla="val 6000"/>
+            </a:avLst>
+          </a:prstGeom>
+          <a:solidFill>
+            <a:srgbClr val="2E3874"/>
+          </a:solidFill>
+          <a:ln>
+            <a:noFill/>
+          </a:ln>
+          <a:effectLst/>
+        </p:spPr>
+        <p:style>
+          <a:lnRef idx="1">
+            <a:schemeClr val="accent1"/>
+          </a:lnRef>
+          <a:fillRef idx="3">
+            <a:schemeClr val="accent1"/>
+          </a:fillRef>
+          <a:effectRef idx="2">
+            <a:schemeClr val="accent1"/>
+          </a:effectRef>
+          <a:fontRef idx="minor">
+            <a:schemeClr val="lt1"/>
+          </a:fontRef>
+        </p:style>
+        <p:txBody>
+          <a:bodyPr rtlCol="0" anchor="ctr"/>
+          <a:lstStyle/>
+          <a:p/>
+        </p:txBody>
+      </p:sp>
+      <p:sp>
+        <p:nvSpPr>
+          <p:cNvPr id="7" name="TextBox 6"/>
+          <p:cNvSpPr txBox="1"/>
+          <p:nvPr/>
+        </p:nvSpPr>
+        <p:spPr>
+          <a:xfrm>
+            <a:off x="7863840" y="5669280"/>
+            <a:ext cx="3291840" cy="411480"/>
+          </a:xfrm>
+          <a:prstGeom prst="rect">
+            <a:avLst/>
+          </a:prstGeom>
+          <a:noFill/>
+        </p:spPr>
+        <p:txBody>
+          <a:bodyPr wrap="square" lIns="0" rIns="0" tIns="0" bIns="0" anchor="t">
+            <a:spAutoFit/>
+          </a:bodyPr>
+          <a:lstStyle/>
+          <a:p>
+            <a:pPr algn="l">
+              <a:lnSpc>
+                <a:spcPct val="100000"/>
+              </a:lnSpc>
+            </a:pPr>
+            <a:r>
+              <a:rPr sz="1250" b="1" i="0">
+                <a:solidFill>
+                  <a:srgbClr val="E88B2F"/>
+                </a:solidFill>
+                <a:latin typeface="Calibri"/>
+              </a:rPr>
+              <a:t>Still unmeasured: does draft t+1 beat draft t?</a:t>
             </a:r>
           </a:p>
         </p:txBody>
@@ -10752,6 +12397,583 @@
                 <a:latin typeface="Calibri"/>
               </a:rPr>
               <a:t>The bar is not “beat one rollout”. It is: beat training-free consensus voting, and beat the model’s own one-shot prediction.</a:t>
+            </a:r>
+          </a:p>
+        </p:txBody>
+      </p:sp>
+    </p:spTree>
+  </p:cSld>
+  <p:clrMapOvr>
+    <a:masterClrMapping/>
+  </p:clrMapOvr>
+</p:sld>
+</file>
+
+<file path=ppt/slides/slide20.xml><?xml version="1.0" encoding="utf-8"?>
+<p:sld xmlns:a="http://schemas.openxmlformats.org/drawingml/2006/main" xmlns:p="http://schemas.openxmlformats.org/presentationml/2006/main" xmlns:r="http://schemas.openxmlformats.org/officeDocument/2006/relationships">
+  <p:cSld>
+    <p:bg>
+      <p:bgPr>
+        <a:solidFill>
+          <a:srgbClr val="21295C"/>
+        </a:solidFill>
+        <a:effectLst/>
+      </p:bgPr>
+    </p:bg>
+    <p:spTree>
+      <p:nvGrpSpPr>
+        <p:cNvPr id="1" name=""/>
+        <p:cNvGrpSpPr/>
+        <p:nvPr/>
+      </p:nvGrpSpPr>
+      <p:grpSpPr/>
+      <p:sp>
+        <p:nvSpPr>
+          <p:cNvPr id="2" name="TextBox 1"/>
+          <p:cNvSpPr txBox="1"/>
+          <p:nvPr/>
+        </p:nvSpPr>
+        <p:spPr>
+          <a:xfrm>
+            <a:off x="640080" y="457200"/>
+            <a:ext cx="10911535" cy="777240"/>
+          </a:xfrm>
+          <a:prstGeom prst="rect">
+            <a:avLst/>
+          </a:prstGeom>
+          <a:noFill/>
+        </p:spPr>
+        <p:txBody>
+          <a:bodyPr wrap="square" lIns="0" rIns="0" tIns="0" bIns="0" anchor="t">
+            <a:spAutoFit/>
+          </a:bodyPr>
+          <a:lstStyle/>
+          <a:p>
+            <a:pPr algn="l">
+              <a:lnSpc>
+                <a:spcPct val="100000"/>
+              </a:lnSpc>
+            </a:pPr>
+            <a:r>
+              <a:rPr sz="3400" b="1" i="0">
+                <a:solidFill>
+                  <a:srgbClr val="FFFFFF"/>
+                </a:solidFill>
+                <a:latin typeface="Cambria"/>
+              </a:rPr>
+              <a:t>The 1M push — now a harder call</a:t>
+            </a:r>
+          </a:p>
+        </p:txBody>
+      </p:sp>
+      <p:sp>
+        <p:nvSpPr>
+          <p:cNvPr id="3" name="TextBox 2"/>
+          <p:cNvSpPr txBox="1"/>
+          <p:nvPr/>
+        </p:nvSpPr>
+        <p:spPr>
+          <a:xfrm>
+            <a:off x="640080" y="1207008"/>
+            <a:ext cx="10911535" cy="457200"/>
+          </a:xfrm>
+          <a:prstGeom prst="rect">
+            <a:avLst/>
+          </a:prstGeom>
+          <a:noFill/>
+        </p:spPr>
+        <p:txBody>
+          <a:bodyPr wrap="square" lIns="0" rIns="0" tIns="0" bIns="0" anchor="t">
+            <a:spAutoFit/>
+          </a:bodyPr>
+          <a:lstStyle/>
+          <a:p>
+            <a:pPr algn="l">
+              <a:lnSpc>
+                <a:spcPct val="100000"/>
+              </a:lnSpc>
+            </a:pPr>
+            <a:r>
+              <a:rPr sz="1500" b="0" i="1">
+                <a:solidFill>
+                  <a:srgbClr val="C9D4E8"/>
+                </a:solidFill>
+                <a:latin typeface="Calibri"/>
+              </a:rPr>
+              <a:t>Cost measured on the 10k batch, not estimated. But scale is not the blocker.</a:t>
+            </a:r>
+          </a:p>
+        </p:txBody>
+      </p:sp>
+      <p:sp>
+        <p:nvSpPr>
+          <p:cNvPr id="4" name="Rounded Rectangle 3"/>
+          <p:cNvSpPr/>
+          <p:nvPr/>
+        </p:nvSpPr>
+        <p:spPr>
+          <a:xfrm>
+            <a:off x="822960" y="2011680"/>
+            <a:ext cx="3246120" cy="1691640"/>
+          </a:xfrm>
+          <a:prstGeom prst="roundRect">
+            <a:avLst>
+              <a:gd name="adj" fmla="val 6000"/>
+            </a:avLst>
+          </a:prstGeom>
+          <a:solidFill>
+            <a:srgbClr val="2E3874"/>
+          </a:solidFill>
+          <a:ln>
+            <a:noFill/>
+          </a:ln>
+          <a:effectLst/>
+        </p:spPr>
+        <p:style>
+          <a:lnRef idx="1">
+            <a:schemeClr val="accent1"/>
+          </a:lnRef>
+          <a:fillRef idx="3">
+            <a:schemeClr val="accent1"/>
+          </a:fillRef>
+          <a:effectRef idx="2">
+            <a:schemeClr val="accent1"/>
+          </a:effectRef>
+          <a:fontRef idx="minor">
+            <a:schemeClr val="lt1"/>
+          </a:fontRef>
+        </p:style>
+        <p:txBody>
+          <a:bodyPr rtlCol="0" anchor="ctr"/>
+          <a:lstStyle/>
+          <a:p/>
+        </p:txBody>
+      </p:sp>
+      <p:sp>
+        <p:nvSpPr>
+          <p:cNvPr id="5" name="TextBox 4"/>
+          <p:cNvSpPr txBox="1"/>
+          <p:nvPr/>
+        </p:nvSpPr>
+        <p:spPr>
+          <a:xfrm>
+            <a:off x="822960" y="2240280"/>
+            <a:ext cx="3246120" cy="731520"/>
+          </a:xfrm>
+          <a:prstGeom prst="rect">
+            <a:avLst/>
+          </a:prstGeom>
+          <a:noFill/>
+        </p:spPr>
+        <p:txBody>
+          <a:bodyPr wrap="square" lIns="0" rIns="0" tIns="0" bIns="0" anchor="t">
+            <a:spAutoFit/>
+          </a:bodyPr>
+          <a:lstStyle/>
+          <a:p>
+            <a:pPr algn="ctr">
+              <a:lnSpc>
+                <a:spcPct val="100000"/>
+              </a:lnSpc>
+            </a:pPr>
+            <a:r>
+              <a:rPr sz="3400" b="1" i="0">
+                <a:solidFill>
+                  <a:srgbClr val="E88B2F"/>
+                </a:solidFill>
+                <a:latin typeface="Cambria"/>
+              </a:rPr>
+              <a:t>14,350</a:t>
+            </a:r>
+          </a:p>
+        </p:txBody>
+      </p:sp>
+      <p:sp>
+        <p:nvSpPr>
+          <p:cNvPr id="6" name="TextBox 5"/>
+          <p:cNvSpPr txBox="1"/>
+          <p:nvPr/>
+        </p:nvSpPr>
+        <p:spPr>
+          <a:xfrm>
+            <a:off x="822960" y="3017520"/>
+            <a:ext cx="3246120" cy="457200"/>
+          </a:xfrm>
+          <a:prstGeom prst="rect">
+            <a:avLst/>
+          </a:prstGeom>
+          <a:noFill/>
+        </p:spPr>
+        <p:txBody>
+          <a:bodyPr wrap="square" lIns="0" rIns="0" tIns="0" bIns="0" anchor="t">
+            <a:spAutoFit/>
+          </a:bodyPr>
+          <a:lstStyle/>
+          <a:p>
+            <a:pPr algn="ctr">
+              <a:lnSpc>
+                <a:spcPct val="100000"/>
+              </a:lnSpc>
+            </a:pPr>
+            <a:r>
+              <a:rPr sz="1250" b="0" i="0">
+                <a:solidFill>
+                  <a:srgbClr val="C9D4E8"/>
+                </a:solidFill>
+                <a:latin typeface="Calibri"/>
+              </a:rPr>
+              <a:t>rollouts per GPU-hour</a:t>
+            </a:r>
+          </a:p>
+        </p:txBody>
+      </p:sp>
+      <p:sp>
+        <p:nvSpPr>
+          <p:cNvPr id="7" name="Rounded Rectangle 6"/>
+          <p:cNvSpPr/>
+          <p:nvPr/>
+        </p:nvSpPr>
+        <p:spPr>
+          <a:xfrm>
+            <a:off x="4434840" y="2011680"/>
+            <a:ext cx="3246120" cy="1691640"/>
+          </a:xfrm>
+          <a:prstGeom prst="roundRect">
+            <a:avLst>
+              <a:gd name="adj" fmla="val 6000"/>
+            </a:avLst>
+          </a:prstGeom>
+          <a:solidFill>
+            <a:srgbClr val="2E3874"/>
+          </a:solidFill>
+          <a:ln>
+            <a:noFill/>
+          </a:ln>
+          <a:effectLst/>
+        </p:spPr>
+        <p:style>
+          <a:lnRef idx="1">
+            <a:schemeClr val="accent1"/>
+          </a:lnRef>
+          <a:fillRef idx="3">
+            <a:schemeClr val="accent1"/>
+          </a:fillRef>
+          <a:effectRef idx="2">
+            <a:schemeClr val="accent1"/>
+          </a:effectRef>
+          <a:fontRef idx="minor">
+            <a:schemeClr val="lt1"/>
+          </a:fontRef>
+        </p:style>
+        <p:txBody>
+          <a:bodyPr rtlCol="0" anchor="ctr"/>
+          <a:lstStyle/>
+          <a:p/>
+        </p:txBody>
+      </p:sp>
+      <p:sp>
+        <p:nvSpPr>
+          <p:cNvPr id="8" name="TextBox 7"/>
+          <p:cNvSpPr txBox="1"/>
+          <p:nvPr/>
+        </p:nvSpPr>
+        <p:spPr>
+          <a:xfrm>
+            <a:off x="4434840" y="2240280"/>
+            <a:ext cx="3246120" cy="731520"/>
+          </a:xfrm>
+          <a:prstGeom prst="rect">
+            <a:avLst/>
+          </a:prstGeom>
+          <a:noFill/>
+        </p:spPr>
+        <p:txBody>
+          <a:bodyPr wrap="square" lIns="0" rIns="0" tIns="0" bIns="0" anchor="t">
+            <a:spAutoFit/>
+          </a:bodyPr>
+          <a:lstStyle/>
+          <a:p>
+            <a:pPr algn="ctr">
+              <a:lnSpc>
+                <a:spcPct val="100000"/>
+              </a:lnSpc>
+            </a:pPr>
+            <a:r>
+              <a:rPr sz="3400" b="1" i="0">
+                <a:solidFill>
+                  <a:srgbClr val="FFFFFF"/>
+                </a:solidFill>
+                <a:latin typeface="Cambria"/>
+              </a:rPr>
+              <a:t>~1,700</a:t>
+            </a:r>
+          </a:p>
+        </p:txBody>
+      </p:sp>
+      <p:sp>
+        <p:nvSpPr>
+          <p:cNvPr id="9" name="TextBox 8"/>
+          <p:cNvSpPr txBox="1"/>
+          <p:nvPr/>
+        </p:nvSpPr>
+        <p:spPr>
+          <a:xfrm>
+            <a:off x="4434840" y="3017520"/>
+            <a:ext cx="3246120" cy="457200"/>
+          </a:xfrm>
+          <a:prstGeom prst="rect">
+            <a:avLst/>
+          </a:prstGeom>
+          <a:noFill/>
+        </p:spPr>
+        <p:txBody>
+          <a:bodyPr wrap="square" lIns="0" rIns="0" tIns="0" bIns="0" anchor="t">
+            <a:spAutoFit/>
+          </a:bodyPr>
+          <a:lstStyle/>
+          <a:p>
+            <a:pPr algn="ctr">
+              <a:lnSpc>
+                <a:spcPct val="100000"/>
+              </a:lnSpc>
+            </a:pPr>
+            <a:r>
+              <a:rPr sz="1250" b="0" i="0">
+                <a:solidFill>
+                  <a:srgbClr val="C9D4E8"/>
+                </a:solidFill>
+                <a:latin typeface="Calibri"/>
+              </a:rPr>
+              <a:t>H100-hours for 1M × 24</a:t>
+            </a:r>
+          </a:p>
+        </p:txBody>
+      </p:sp>
+      <p:sp>
+        <p:nvSpPr>
+          <p:cNvPr id="10" name="Rounded Rectangle 9"/>
+          <p:cNvSpPr/>
+          <p:nvPr/>
+        </p:nvSpPr>
+        <p:spPr>
+          <a:xfrm>
+            <a:off x="8046720" y="2011680"/>
+            <a:ext cx="3246120" cy="1691640"/>
+          </a:xfrm>
+          <a:prstGeom prst="roundRect">
+            <a:avLst>
+              <a:gd name="adj" fmla="val 6000"/>
+            </a:avLst>
+          </a:prstGeom>
+          <a:solidFill>
+            <a:srgbClr val="2E3874"/>
+          </a:solidFill>
+          <a:ln>
+            <a:noFill/>
+          </a:ln>
+          <a:effectLst/>
+        </p:spPr>
+        <p:style>
+          <a:lnRef idx="1">
+            <a:schemeClr val="accent1"/>
+          </a:lnRef>
+          <a:fillRef idx="3">
+            <a:schemeClr val="accent1"/>
+          </a:fillRef>
+          <a:effectRef idx="2">
+            <a:schemeClr val="accent1"/>
+          </a:effectRef>
+          <a:fontRef idx="minor">
+            <a:schemeClr val="lt1"/>
+          </a:fontRef>
+        </p:style>
+        <p:txBody>
+          <a:bodyPr rtlCol="0" anchor="ctr"/>
+          <a:lstStyle/>
+          <a:p/>
+        </p:txBody>
+      </p:sp>
+      <p:sp>
+        <p:nvSpPr>
+          <p:cNvPr id="11" name="TextBox 10"/>
+          <p:cNvSpPr txBox="1"/>
+          <p:nvPr/>
+        </p:nvSpPr>
+        <p:spPr>
+          <a:xfrm>
+            <a:off x="8046720" y="2240280"/>
+            <a:ext cx="3246120" cy="731520"/>
+          </a:xfrm>
+          <a:prstGeom prst="rect">
+            <a:avLst/>
+          </a:prstGeom>
+          <a:noFill/>
+        </p:spPr>
+        <p:txBody>
+          <a:bodyPr wrap="square" lIns="0" rIns="0" tIns="0" bIns="0" anchor="t">
+            <a:spAutoFit/>
+          </a:bodyPr>
+          <a:lstStyle/>
+          <a:p>
+            <a:pPr algn="ctr">
+              <a:lnSpc>
+                <a:spcPct val="100000"/>
+              </a:lnSpc>
+            </a:pPr>
+            <a:r>
+              <a:rPr sz="3400" b="1" i="0">
+                <a:solidFill>
+                  <a:srgbClr val="9FC4E0"/>
+                </a:solidFill>
+                <a:latin typeface="Cambria"/>
+              </a:rPr>
+              <a:t>~26 h</a:t>
+            </a:r>
+          </a:p>
+        </p:txBody>
+      </p:sp>
+      <p:sp>
+        <p:nvSpPr>
+          <p:cNvPr id="12" name="TextBox 11"/>
+          <p:cNvSpPr txBox="1"/>
+          <p:nvPr/>
+        </p:nvSpPr>
+        <p:spPr>
+          <a:xfrm>
+            <a:off x="8046720" y="3017520"/>
+            <a:ext cx="3246120" cy="457200"/>
+          </a:xfrm>
+          <a:prstGeom prst="rect">
+            <a:avLst/>
+          </a:prstGeom>
+          <a:noFill/>
+        </p:spPr>
+        <p:txBody>
+          <a:bodyPr wrap="square" lIns="0" rIns="0" tIns="0" bIns="0" anchor="t">
+            <a:spAutoFit/>
+          </a:bodyPr>
+          <a:lstStyle/>
+          <a:p>
+            <a:pPr algn="ctr">
+              <a:lnSpc>
+                <a:spcPct val="100000"/>
+              </a:lnSpc>
+            </a:pPr>
+            <a:r>
+              <a:rPr sz="1250" b="0" i="0">
+                <a:solidFill>
+                  <a:srgbClr val="C9D4E8"/>
+                </a:solidFill>
+                <a:latin typeface="Calibri"/>
+              </a:rPr>
+              <a:t>wall on 64 shards</a:t>
+            </a:r>
+          </a:p>
+        </p:txBody>
+      </p:sp>
+      <p:sp>
+        <p:nvSpPr>
+          <p:cNvPr id="13" name="TextBox 12"/>
+          <p:cNvSpPr txBox="1"/>
+          <p:nvPr/>
+        </p:nvSpPr>
+        <p:spPr>
+          <a:xfrm>
+            <a:off x="822960" y="4023360"/>
+            <a:ext cx="10515600" cy="2103120"/>
+          </a:xfrm>
+          <a:prstGeom prst="rect">
+            <a:avLst/>
+          </a:prstGeom>
+          <a:noFill/>
+        </p:spPr>
+        <p:txBody>
+          <a:bodyPr wrap="square" lIns="0" rIns="0" tIns="0" bIns="0">
+            <a:spAutoFit/>
+          </a:bodyPr>
+          <a:lstStyle/>
+          <a:p>
+            <a:pPr>
+              <a:lnSpc>
+                <a:spcPct val="115000"/>
+              </a:lnSpc>
+              <a:spcAft>
+                <a:spcPts val="1200"/>
+              </a:spcAft>
+            </a:pPr>
+            <a:r>
+              <a:rPr sz="1400" b="1">
+                <a:solidFill>
+                  <a:srgbClr val="E88B2F"/>
+                </a:solidFill>
+                <a:latin typeface="Calibri"/>
+              </a:rPr>
+              <a:t>~2× the earlier estimate. </a:t>
+            </a:r>
+            <a:r>
+              <a:rPr sz="1400">
+                <a:solidFill>
+                  <a:srgbClr val="DEE7F5"/>
+                </a:solidFill>
+                <a:latin typeface="Calibri"/>
+              </a:rPr>
+              <a:t>The top-k fix roughly doubled rollout length — which is the point (n_pred 201 vs 95), but it doubles the bill.</a:t>
+            </a:r>
+          </a:p>
+          <a:p>
+            <a:pPr>
+              <a:lnSpc>
+                <a:spcPct val="115000"/>
+              </a:lnSpc>
+              <a:spcAft>
+                <a:spcPts val="1200"/>
+              </a:spcAft>
+            </a:pPr>
+            <a:r>
+              <a:rPr sz="1400" b="1">
+                <a:solidFill>
+                  <a:srgbClr val="E88B2F"/>
+                </a:solidFill>
+                <a:latin typeface="Calibri"/>
+              </a:rPr>
+              <a:t>Is 1M the right number? </a:t>
+            </a:r>
+            <a:r>
+              <a:rPr sz="1400">
+                <a:solidFill>
+                  <a:srgbClr val="DEE7F5"/>
+                </a:solidFill>
+                <a:latin typeface="Calibri"/>
+              </a:rPr>
+              <a:t>250k proteins is ~420 H100-hours (~26h on 16 shards) and plausibly buys most of the fold diversity for a quarter of the spend.</a:t>
+            </a:r>
+          </a:p>
+          <a:p>
+            <a:pPr>
+              <a:lnSpc>
+                <a:spcPct val="115000"/>
+              </a:lnSpc>
+              <a:spcAft>
+                <a:spcPts val="1200"/>
+              </a:spcAft>
+            </a:pPr>
+            <a:r>
+              <a:rPr sz="1400" b="1">
+                <a:solidFill>
+                  <a:srgbClr val="E88B2F"/>
+                </a:solidFill>
+                <a:latin typeface="Calibri"/>
+              </a:rPr>
+              <a:t>Phase 3 changes the question. </a:t>
+            </a:r>
+            <a:r>
+              <a:rPr sz="1400">
+                <a:solidFill>
+                  <a:srgbClr val="DEE7F5"/>
+                </a:solidFill>
+                <a:latin typeface="Calibri"/>
+              </a:rPr>
+              <a:t>The kill criterion is met and the binding constraint is forgetting, not data volume — so spending ~1,700 H100-hours on the same recipe would buy a better-trained version of a model that loses to its own base.</a:t>
             </a:r>
           </a:p>
         </p:txBody>
